--- a/outputs/ieps_scf_final_presentation.pptx
+++ b/outputs/ieps_scf_final_presentation.pptx
@@ -513,7 +513,7 @@
       </p:sp>
       <p:pic>
         <p:nvPicPr>
-          <p:cNvPr id="14" name="image" descr="panel_greedy.png"/>
+          <p:cNvPr id="14" name="image" descr="panel.png"/>
           <p:cNvPicPr/>
           <p:nvPr/>
         </p:nvPicPr>
@@ -5148,6 +5148,45 @@
         </p:nvSpPr>
         <p:spPr>
           <a:xfrm>
+            <a:off x="895350" y="5581650"/>
+            <a:ext cx="10363200" cy="342900"/>
+          </a:xfrm>
+          <a:prstGeom prst="rect">
+            <a:avLst/>
+          </a:prstGeom>
+          <a:noFill/>
+          <a:ln>
+            <a:noFill/>
+          </a:ln>
+        </p:spPr>
+        <p:txBody>
+          <a:bodyPr wrap="square" anchor="t" lIns="0" tIns="0" rIns="0" bIns="0">
+            <a:spAutoFit/>
+          </a:bodyPr>
+          <a:lstStyle/>
+          <a:p>
+            <a:pPr algn="l"/>
+            <a:r>
+              <a:rPr lang="en-US" sz="1200" dirty="0">
+                <a:solidFill>
+                  <a:srgbClr val="5B6472"/>
+                </a:solidFill>
+                <a:latin typeface="Aptos"/>
+                <a:cs typeface="Aptos"/>
+              </a:rPr>
+              <a:t>Scope note: the improvement is claimed for the synthetic concave U-shape only. On the real vase the improved mode underperforms paper mode (proxy F1 0.25 vs 0.94), so it is an extension for the U-shape failure mode, not a general upgrade.</a:t>
+            </a:r>
+          </a:p>
+        </p:txBody>
+      </p:sp>
+      <p:sp>
+        <p:nvSpPr>
+          <p:cNvPr id="68" name="text"/>
+          <p:cNvSpPr txBox="1"/>
+          <p:nvPr/>
+        </p:nvSpPr>
+        <p:spPr>
+          <a:xfrm>
             <a:off x="609600" y="6438900"/>
             <a:ext cx="4000500" cy="190500"/>
           </a:xfrm>
@@ -5181,7 +5220,7 @@
       </p:sp>
       <p:sp>
         <p:nvSpPr>
-          <p:cNvPr id="68" name="text"/>
+          <p:cNvPr id="69" name="text"/>
           <p:cNvSpPr txBox="1"/>
           <p:nvPr/>
         </p:nvSpPr>
@@ -5907,7 +5946,7 @@
                 <a:latin typeface="Aptos"/>
                 <a:cs typeface="Aptos"/>
               </a:rPr>
-              <a:t>13.1 ms</a:t>
+              <a:t>9.3 ms</a:t>
             </a:r>
           </a:p>
         </p:txBody>
@@ -6159,7 +6198,7 @@
                 <a:latin typeface="Aptos"/>
                 <a:cs typeface="Aptos"/>
               </a:rPr>
-              <a:t>227.1 ms</a:t>
+              <a:t>166.5 ms</a:t>
             </a:r>
           </a:p>
         </p:txBody>
@@ -6411,14 +6450,14 @@
                 <a:latin typeface="Aptos"/>
                 <a:cs typeface="Aptos"/>
               </a:rPr>
-              <a:t>2586.0 ms</a:t>
+              <a:t>1824.5 ms</a:t>
             </a:r>
           </a:p>
         </p:txBody>
       </p:sp>
       <p:pic>
         <p:nvPicPr>
-          <p:cNvPr id="39" name="image" descr="panel_greedy.png"/>
+          <p:cNvPr id="39" name="image" descr="panel.png"/>
           <p:cNvPicPr/>
           <p:nvPr/>
         </p:nvPicPr>
@@ -8628,7 +8667,7 @@
                 <a:latin typeface="Aptos"/>
                 <a:cs typeface="Aptos"/>
               </a:rPr>
-              <a:t>approximation differs from paper; report as limitation</a:t>
+              <a:t>opposite direction vs paper Table II; approximation limitation</a:t>
             </a:r>
           </a:p>
         </p:txBody>
@@ -8636,6 +8675,45 @@
       <p:sp>
         <p:nvSpPr>
           <p:cNvPr id="61" name="text"/>
+          <p:cNvSpPr txBox="1"/>
+          <p:nvPr/>
+        </p:nvSpPr>
+        <p:spPr>
+          <a:xfrm>
+            <a:off x="1104900" y="5524500"/>
+            <a:ext cx="9982200" cy="381000"/>
+          </a:xfrm>
+          <a:prstGeom prst="rect">
+            <a:avLst/>
+          </a:prstGeom>
+          <a:noFill/>
+          <a:ln>
+            <a:noFill/>
+          </a:ln>
+        </p:spPr>
+        <p:txBody>
+          <a:bodyPr wrap="square" anchor="t" lIns="0" tIns="0" rIns="0" bIns="0">
+            <a:spAutoFit/>
+          </a:bodyPr>
+          <a:lstStyle/>
+          <a:p>
+            <a:pPr algn="l"/>
+            <a:r>
+              <a:rPr lang="en-US" sz="1200" dirty="0">
+                <a:solidFill>
+                  <a:srgbClr val="5B6472"/>
+                </a:solidFill>
+                <a:latin typeface="Aptos"/>
+                <a:cs typeface="Aptos"/>
+              </a:rPr>
+              <a:t>Current runs also show Snake from Yuen-style points &gt;= Snake from IEPS points, and Chen-style == proposed SCF (F1 = 1.0) at all tested SNRs. These approximations do not reproduce the paper's reported gaps and are structural context only.</a:t>
+            </a:r>
+          </a:p>
+        </p:txBody>
+      </p:sp>
+      <p:sp>
+        <p:nvSpPr>
+          <p:cNvPr id="62" name="text"/>
           <p:cNvSpPr txBox="1"/>
           <p:nvPr/>
         </p:nvSpPr>
@@ -8674,7 +8752,7 @@
       </p:sp>
       <p:sp>
         <p:nvSpPr>
-          <p:cNvPr id="62" name="text"/>
+          <p:cNvPr id="63" name="text"/>
           <p:cNvSpPr txBox="1"/>
           <p:nvPr/>
         </p:nvSpPr>
@@ -8903,7 +8981,7 @@
       </p:sp>
       <p:pic>
         <p:nvPicPr>
-          <p:cNvPr id="7" name="image" descr="panel_greedy.png"/>
+          <p:cNvPr id="7" name="image" descr="panel.png"/>
           <p:cNvPicPr/>
           <p:nvPr/>
         </p:nvPicPr>
@@ -17574,7 +17652,7 @@
       </p:sp>
       <p:pic>
         <p:nvPicPr>
-          <p:cNvPr id="46" name="image" descr="scf_greedy.png"/>
+          <p:cNvPr id="46" name="image" descr="scf_contour.png"/>
           <p:cNvPicPr/>
           <p:nvPr/>
         </p:nvPicPr>
@@ -17635,7 +17713,7 @@
       </p:sp>
       <p:pic>
         <p:nvPicPr>
-          <p:cNvPr id="48" name="image" descr="scf_greedy.png"/>
+          <p:cNvPr id="48" name="image" descr="scf_contour.png"/>
           <p:cNvPicPr/>
           <p:nvPr/>
         </p:nvPicPr>
@@ -17964,7 +18042,7 @@
       </p:sp>
       <p:pic>
         <p:nvPicPr>
-          <p:cNvPr id="7" name="image" descr="panel_greedy.png"/>
+          <p:cNvPr id="7" name="image" descr="panel.png"/>
           <p:cNvPicPr/>
           <p:nvPr/>
         </p:nvPicPr>
@@ -18025,7 +18103,7 @@
       </p:sp>
       <p:pic>
         <p:nvPicPr>
-          <p:cNvPr id="9" name="image" descr="panel_greedy.png"/>
+          <p:cNvPr id="9" name="image" descr="panel.png"/>
           <p:cNvPicPr/>
           <p:nvPr/>
         </p:nvPicPr>
@@ -20819,7 +20897,7 @@
                 <a:latin typeface="Aptos"/>
                 <a:cs typeface="Aptos"/>
               </a:rPr>
-              <a:t>16.5 ms</a:t>
+              <a:t>8.1 ms</a:t>
             </a:r>
           </a:p>
         </p:txBody>
@@ -21134,7 +21212,7 @@
                 <a:latin typeface="Aptos"/>
                 <a:cs typeface="Aptos"/>
               </a:rPr>
-              <a:t>13.1 ms</a:t>
+              <a:t>9.3 ms</a:t>
             </a:r>
           </a:p>
         </p:txBody>
@@ -21378,7 +21456,7 @@
                 <a:latin typeface="Aptos"/>
                 <a:cs typeface="Aptos"/>
               </a:rPr>
-              <a:t>These are not small coding details. They directly change selected IEPS points, segment tracing, and reported accuracy.</a:t>
+              <a:t>The main reproducibility challenge was SCF: the paper gives the gravity-force and mask idea, but not stopping tolerance, loop prevention, tie-breaking, weak-gradient fallback, or max-step handling. These choices were implemented explicitly and evaluated.</a:t>
             </a:r>
           </a:p>
         </p:txBody>
@@ -21605,7 +21683,7 @@
         <p:spPr>
           <a:xfrm>
             <a:off x="609600" y="2152650"/>
-            <a:ext cx="2852928" cy="461962"/>
+            <a:ext cx="2852928" cy="410633"/>
           </a:xfrm>
           <a:prstGeom prst="rect">
             <a:avLst/>
@@ -21629,7 +21707,7 @@
         <p:spPr>
           <a:xfrm>
             <a:off x="685800" y="2209800"/>
-            <a:ext cx="2700528" cy="366712"/>
+            <a:ext cx="2700528" cy="315383"/>
           </a:xfrm>
           <a:prstGeom prst="rect">
             <a:avLst/>
@@ -21668,7 +21746,7 @@
         <p:spPr>
           <a:xfrm>
             <a:off x="3462528" y="2152650"/>
-            <a:ext cx="4059936" cy="461962"/>
+            <a:ext cx="4059936" cy="410633"/>
           </a:xfrm>
           <a:prstGeom prst="rect">
             <a:avLst/>
@@ -21692,7 +21770,7 @@
         <p:spPr>
           <a:xfrm>
             <a:off x="3538728" y="2209800"/>
-            <a:ext cx="3907536" cy="366712"/>
+            <a:ext cx="3907536" cy="315383"/>
           </a:xfrm>
           <a:prstGeom prst="rect">
             <a:avLst/>
@@ -21731,7 +21809,7 @@
         <p:spPr>
           <a:xfrm>
             <a:off x="7522464" y="2152650"/>
-            <a:ext cx="4059936" cy="461962"/>
+            <a:ext cx="4059936" cy="410633"/>
           </a:xfrm>
           <a:prstGeom prst="rect">
             <a:avLst/>
@@ -21755,7 +21833,7 @@
         <p:spPr>
           <a:xfrm>
             <a:off x="7598664" y="2209800"/>
-            <a:ext cx="3907536" cy="366712"/>
+            <a:ext cx="3907536" cy="315383"/>
           </a:xfrm>
           <a:prstGeom prst="rect">
             <a:avLst/>
@@ -21793,8 +21871,8 @@
         </p:nvSpPr>
         <p:spPr>
           <a:xfrm>
-            <a:off x="609600" y="2614612"/>
-            <a:ext cx="2852928" cy="461962"/>
+            <a:off x="609600" y="2563283"/>
+            <a:ext cx="2852928" cy="410633"/>
           </a:xfrm>
           <a:prstGeom prst="rect">
             <a:avLst/>
@@ -21817,8 +21895,8 @@
         </p:nvSpPr>
         <p:spPr>
           <a:xfrm>
-            <a:off x="685800" y="2671762"/>
-            <a:ext cx="2700528" cy="366712"/>
+            <a:off x="685800" y="2620433"/>
+            <a:ext cx="2700528" cy="315383"/>
           </a:xfrm>
           <a:prstGeom prst="rect">
             <a:avLst/>
@@ -21856,8 +21934,8 @@
         </p:nvSpPr>
         <p:spPr>
           <a:xfrm>
-            <a:off x="3462528" y="2614612"/>
-            <a:ext cx="4059936" cy="461962"/>
+            <a:off x="3462528" y="2563283"/>
+            <a:ext cx="4059936" cy="410633"/>
           </a:xfrm>
           <a:prstGeom prst="rect">
             <a:avLst/>
@@ -21880,8 +21958,8 @@
         </p:nvSpPr>
         <p:spPr>
           <a:xfrm>
-            <a:off x="3538728" y="2671762"/>
-            <a:ext cx="3907536" cy="366712"/>
+            <a:off x="3538728" y="2620433"/>
+            <a:ext cx="3907536" cy="315383"/>
           </a:xfrm>
           <a:prstGeom prst="rect">
             <a:avLst/>
@@ -21919,8 +21997,8 @@
         </p:nvSpPr>
         <p:spPr>
           <a:xfrm>
-            <a:off x="7522464" y="2614612"/>
-            <a:ext cx="4059936" cy="461962"/>
+            <a:off x="7522464" y="2563283"/>
+            <a:ext cx="4059936" cy="410633"/>
           </a:xfrm>
           <a:prstGeom prst="rect">
             <a:avLst/>
@@ -21943,8 +22021,8 @@
         </p:nvSpPr>
         <p:spPr>
           <a:xfrm>
-            <a:off x="7598664" y="2671762"/>
-            <a:ext cx="3907536" cy="366712"/>
+            <a:off x="7598664" y="2620433"/>
+            <a:ext cx="3907536" cy="315383"/>
           </a:xfrm>
           <a:prstGeom prst="rect">
             <a:avLst/>
@@ -21982,8 +22060,8 @@
         </p:nvSpPr>
         <p:spPr>
           <a:xfrm>
-            <a:off x="609600" y="3076575"/>
-            <a:ext cx="2852928" cy="461962"/>
+            <a:off x="609600" y="2973917"/>
+            <a:ext cx="2852928" cy="410633"/>
           </a:xfrm>
           <a:prstGeom prst="rect">
             <a:avLst/>
@@ -22006,8 +22084,8 @@
         </p:nvSpPr>
         <p:spPr>
           <a:xfrm>
-            <a:off x="685800" y="3133725"/>
-            <a:ext cx="2700528" cy="366712"/>
+            <a:off x="685800" y="3031067"/>
+            <a:ext cx="2700528" cy="315383"/>
           </a:xfrm>
           <a:prstGeom prst="rect">
             <a:avLst/>
@@ -22045,8 +22123,8 @@
         </p:nvSpPr>
         <p:spPr>
           <a:xfrm>
-            <a:off x="3462528" y="3076575"/>
-            <a:ext cx="4059936" cy="461962"/>
+            <a:off x="3462528" y="2973917"/>
+            <a:ext cx="4059936" cy="410633"/>
           </a:xfrm>
           <a:prstGeom prst="rect">
             <a:avLst/>
@@ -22069,8 +22147,8 @@
         </p:nvSpPr>
         <p:spPr>
           <a:xfrm>
-            <a:off x="3538728" y="3133725"/>
-            <a:ext cx="3907536" cy="366712"/>
+            <a:off x="3538728" y="3031067"/>
+            <a:ext cx="3907536" cy="315383"/>
           </a:xfrm>
           <a:prstGeom prst="rect">
             <a:avLst/>
@@ -22108,8 +22186,8 @@
         </p:nvSpPr>
         <p:spPr>
           <a:xfrm>
-            <a:off x="7522464" y="3076575"/>
-            <a:ext cx="4059936" cy="461962"/>
+            <a:off x="7522464" y="2973917"/>
+            <a:ext cx="4059936" cy="410633"/>
           </a:xfrm>
           <a:prstGeom prst="rect">
             <a:avLst/>
@@ -22132,8 +22210,8 @@
         </p:nvSpPr>
         <p:spPr>
           <a:xfrm>
-            <a:off x="7598664" y="3133725"/>
-            <a:ext cx="3907536" cy="366712"/>
+            <a:off x="7598664" y="3031067"/>
+            <a:ext cx="3907536" cy="315383"/>
           </a:xfrm>
           <a:prstGeom prst="rect">
             <a:avLst/>
@@ -22171,8 +22249,8 @@
         </p:nvSpPr>
         <p:spPr>
           <a:xfrm>
-            <a:off x="609600" y="3538538"/>
-            <a:ext cx="2852928" cy="461962"/>
+            <a:off x="609600" y="3384550"/>
+            <a:ext cx="2852928" cy="410633"/>
           </a:xfrm>
           <a:prstGeom prst="rect">
             <a:avLst/>
@@ -22195,8 +22273,8 @@
         </p:nvSpPr>
         <p:spPr>
           <a:xfrm>
-            <a:off x="685800" y="3595688"/>
-            <a:ext cx="2700528" cy="366712"/>
+            <a:off x="685800" y="3441700"/>
+            <a:ext cx="2700528" cy="315383"/>
           </a:xfrm>
           <a:prstGeom prst="rect">
             <a:avLst/>
@@ -22234,8 +22312,8 @@
         </p:nvSpPr>
         <p:spPr>
           <a:xfrm>
-            <a:off x="3462528" y="3538538"/>
-            <a:ext cx="4059936" cy="461962"/>
+            <a:off x="3462528" y="3384550"/>
+            <a:ext cx="4059936" cy="410633"/>
           </a:xfrm>
           <a:prstGeom prst="rect">
             <a:avLst/>
@@ -22258,8 +22336,8 @@
         </p:nvSpPr>
         <p:spPr>
           <a:xfrm>
-            <a:off x="3538728" y="3595688"/>
-            <a:ext cx="3907536" cy="366712"/>
+            <a:off x="3538728" y="3441700"/>
+            <a:ext cx="3907536" cy="315383"/>
           </a:xfrm>
           <a:prstGeom prst="rect">
             <a:avLst/>
@@ -22297,8 +22375,8 @@
         </p:nvSpPr>
         <p:spPr>
           <a:xfrm>
-            <a:off x="7522464" y="3538538"/>
-            <a:ext cx="4059936" cy="461962"/>
+            <a:off x="7522464" y="3384550"/>
+            <a:ext cx="4059936" cy="410633"/>
           </a:xfrm>
           <a:prstGeom prst="rect">
             <a:avLst/>
@@ -22321,8 +22399,8 @@
         </p:nvSpPr>
         <p:spPr>
           <a:xfrm>
-            <a:off x="7598664" y="3595688"/>
-            <a:ext cx="3907536" cy="366712"/>
+            <a:off x="7598664" y="3441700"/>
+            <a:ext cx="3907536" cy="315383"/>
           </a:xfrm>
           <a:prstGeom prst="rect">
             <a:avLst/>
@@ -22360,8 +22438,8 @@
         </p:nvSpPr>
         <p:spPr>
           <a:xfrm>
-            <a:off x="609600" y="4000500"/>
-            <a:ext cx="2852928" cy="461962"/>
+            <a:off x="609600" y="3795183"/>
+            <a:ext cx="2852928" cy="410633"/>
           </a:xfrm>
           <a:prstGeom prst="rect">
             <a:avLst/>
@@ -22384,8 +22462,8 @@
         </p:nvSpPr>
         <p:spPr>
           <a:xfrm>
-            <a:off x="685800" y="4057650"/>
-            <a:ext cx="2700528" cy="366712"/>
+            <a:off x="685800" y="3852333"/>
+            <a:ext cx="2700528" cy="315383"/>
           </a:xfrm>
           <a:prstGeom prst="rect">
             <a:avLst/>
@@ -22423,8 +22501,8 @@
         </p:nvSpPr>
         <p:spPr>
           <a:xfrm>
-            <a:off x="3462528" y="4000500"/>
-            <a:ext cx="4059936" cy="461962"/>
+            <a:off x="3462528" y="3795183"/>
+            <a:ext cx="4059936" cy="410633"/>
           </a:xfrm>
           <a:prstGeom prst="rect">
             <a:avLst/>
@@ -22447,8 +22525,8 @@
         </p:nvSpPr>
         <p:spPr>
           <a:xfrm>
-            <a:off x="3538728" y="4057650"/>
-            <a:ext cx="3907536" cy="366712"/>
+            <a:off x="3538728" y="3852333"/>
+            <a:ext cx="3907536" cy="315383"/>
           </a:xfrm>
           <a:prstGeom prst="rect">
             <a:avLst/>
@@ -22486,8 +22564,8 @@
         </p:nvSpPr>
         <p:spPr>
           <a:xfrm>
-            <a:off x="7522464" y="4000500"/>
-            <a:ext cx="4059936" cy="461962"/>
+            <a:off x="7522464" y="3795183"/>
+            <a:ext cx="4059936" cy="410633"/>
           </a:xfrm>
           <a:prstGeom prst="rect">
             <a:avLst/>
@@ -22510,8 +22588,8 @@
         </p:nvSpPr>
         <p:spPr>
           <a:xfrm>
-            <a:off x="7598664" y="4057650"/>
-            <a:ext cx="3907536" cy="366712"/>
+            <a:off x="7598664" y="3852333"/>
+            <a:ext cx="3907536" cy="315383"/>
           </a:xfrm>
           <a:prstGeom prst="rect">
             <a:avLst/>
@@ -22549,8 +22627,8 @@
         </p:nvSpPr>
         <p:spPr>
           <a:xfrm>
-            <a:off x="609600" y="4462462"/>
-            <a:ext cx="2852928" cy="461962"/>
+            <a:off x="609600" y="4205817"/>
+            <a:ext cx="2852928" cy="410633"/>
           </a:xfrm>
           <a:prstGeom prst="rect">
             <a:avLst/>
@@ -22573,8 +22651,8 @@
         </p:nvSpPr>
         <p:spPr>
           <a:xfrm>
-            <a:off x="685800" y="4519612"/>
-            <a:ext cx="2700528" cy="366712"/>
+            <a:off x="685800" y="4262967"/>
+            <a:ext cx="2700528" cy="315383"/>
           </a:xfrm>
           <a:prstGeom prst="rect">
             <a:avLst/>
@@ -22612,8 +22690,8 @@
         </p:nvSpPr>
         <p:spPr>
           <a:xfrm>
-            <a:off x="3462528" y="4462462"/>
-            <a:ext cx="4059936" cy="461962"/>
+            <a:off x="3462528" y="4205817"/>
+            <a:ext cx="4059936" cy="410633"/>
           </a:xfrm>
           <a:prstGeom prst="rect">
             <a:avLst/>
@@ -22636,8 +22714,8 @@
         </p:nvSpPr>
         <p:spPr>
           <a:xfrm>
-            <a:off x="3538728" y="4519612"/>
-            <a:ext cx="3907536" cy="366712"/>
+            <a:off x="3538728" y="4262967"/>
+            <a:ext cx="3907536" cy="315383"/>
           </a:xfrm>
           <a:prstGeom prst="rect">
             <a:avLst/>
@@ -22675,8 +22753,8 @@
         </p:nvSpPr>
         <p:spPr>
           <a:xfrm>
-            <a:off x="7522464" y="4462462"/>
-            <a:ext cx="4059936" cy="461962"/>
+            <a:off x="7522464" y="4205817"/>
+            <a:ext cx="4059936" cy="410633"/>
           </a:xfrm>
           <a:prstGeom prst="rect">
             <a:avLst/>
@@ -22699,8 +22777,8 @@
         </p:nvSpPr>
         <p:spPr>
           <a:xfrm>
-            <a:off x="7598664" y="4519612"/>
-            <a:ext cx="3907536" cy="366712"/>
+            <a:off x="7598664" y="4262967"/>
+            <a:ext cx="3907536" cy="315383"/>
           </a:xfrm>
           <a:prstGeom prst="rect">
             <a:avLst/>
@@ -22738,8 +22816,8 @@
         </p:nvSpPr>
         <p:spPr>
           <a:xfrm>
-            <a:off x="609600" y="4924425"/>
-            <a:ext cx="2852928" cy="461962"/>
+            <a:off x="609600" y="4616450"/>
+            <a:ext cx="2852928" cy="410633"/>
           </a:xfrm>
           <a:prstGeom prst="rect">
             <a:avLst/>
@@ -22762,8 +22840,8 @@
         </p:nvSpPr>
         <p:spPr>
           <a:xfrm>
-            <a:off x="685800" y="4981575"/>
-            <a:ext cx="2700528" cy="366712"/>
+            <a:off x="685800" y="4673600"/>
+            <a:ext cx="2700528" cy="315383"/>
           </a:xfrm>
           <a:prstGeom prst="rect">
             <a:avLst/>
@@ -22801,8 +22879,8 @@
         </p:nvSpPr>
         <p:spPr>
           <a:xfrm>
-            <a:off x="3462528" y="4924425"/>
-            <a:ext cx="4059936" cy="461962"/>
+            <a:off x="3462528" y="4616450"/>
+            <a:ext cx="4059936" cy="410633"/>
           </a:xfrm>
           <a:prstGeom prst="rect">
             <a:avLst/>
@@ -22825,8 +22903,8 @@
         </p:nvSpPr>
         <p:spPr>
           <a:xfrm>
-            <a:off x="3538728" y="4981575"/>
-            <a:ext cx="3907536" cy="366712"/>
+            <a:off x="3538728" y="4673600"/>
+            <a:ext cx="3907536" cy="315383"/>
           </a:xfrm>
           <a:prstGeom prst="rect">
             <a:avLst/>
@@ -22864,8 +22942,8 @@
         </p:nvSpPr>
         <p:spPr>
           <a:xfrm>
-            <a:off x="7522464" y="4924425"/>
-            <a:ext cx="4059936" cy="461962"/>
+            <a:off x="7522464" y="4616450"/>
+            <a:ext cx="4059936" cy="410633"/>
           </a:xfrm>
           <a:prstGeom prst="rect">
             <a:avLst/>
@@ -22888,8 +22966,8 @@
         </p:nvSpPr>
         <p:spPr>
           <a:xfrm>
-            <a:off x="7598664" y="4981575"/>
-            <a:ext cx="3907536" cy="366712"/>
+            <a:off x="7598664" y="4673600"/>
+            <a:ext cx="3907536" cy="315383"/>
           </a:xfrm>
           <a:prstGeom prst="rect">
             <a:avLst/>
@@ -22927,8 +23005,8 @@
         </p:nvSpPr>
         <p:spPr>
           <a:xfrm>
-            <a:off x="609600" y="5386388"/>
-            <a:ext cx="2852928" cy="461962"/>
+            <a:off x="609600" y="5027083"/>
+            <a:ext cx="2852928" cy="410633"/>
           </a:xfrm>
           <a:prstGeom prst="rect">
             <a:avLst/>
@@ -22951,8 +23029,8 @@
         </p:nvSpPr>
         <p:spPr>
           <a:xfrm>
-            <a:off x="685800" y="5443538"/>
-            <a:ext cx="2700528" cy="366712"/>
+            <a:off x="685800" y="5084233"/>
+            <a:ext cx="2700528" cy="315383"/>
           </a:xfrm>
           <a:prstGeom prst="rect">
             <a:avLst/>
@@ -22977,6 +23055,195 @@
                 <a:latin typeface="Aptos"/>
                 <a:cs typeface="Aptos"/>
               </a:rPr>
+              <a:t>Missing scan-line edge</a:t>
+            </a:r>
+          </a:p>
+        </p:txBody>
+      </p:sp>
+      <p:sp>
+        <p:nvSpPr>
+          <p:cNvPr id="57" name="rect"/>
+          <p:cNvSpPr/>
+          <p:nvPr/>
+        </p:nvSpPr>
+        <p:spPr>
+          <a:xfrm>
+            <a:off x="3462528" y="5027083"/>
+            <a:ext cx="4059936" cy="410633"/>
+          </a:xfrm>
+          <a:prstGeom prst="rect">
+            <a:avLst/>
+          </a:prstGeom>
+          <a:solidFill>
+            <a:srgbClr val="F1F5F2"/>
+          </a:solidFill>
+          <a:ln w="9525">
+            <a:solidFill>
+              <a:srgbClr val="D7D7CC"/>
+            </a:solidFill>
+          </a:ln>
+        </p:spPr>
+      </p:sp>
+      <p:sp>
+        <p:nvSpPr>
+          <p:cNvPr id="58" name="text"/>
+          <p:cNvSpPr txBox="1"/>
+          <p:nvPr/>
+        </p:nvSpPr>
+        <p:spPr>
+          <a:xfrm>
+            <a:off x="3538728" y="5084233"/>
+            <a:ext cx="3907536" cy="315383"/>
+          </a:xfrm>
+          <a:prstGeom prst="rect">
+            <a:avLst/>
+          </a:prstGeom>
+          <a:noFill/>
+          <a:ln>
+            <a:noFill/>
+          </a:ln>
+        </p:spPr>
+        <p:txBody>
+          <a:bodyPr wrap="square" anchor="ctr" lIns="0" tIns="0" rIns="0" bIns="0">
+            <a:spAutoFit/>
+          </a:bodyPr>
+          <a:lstStyle/>
+          <a:p>
+            <a:pPr algn="l"/>
+            <a:r>
+              <a:rPr lang="en-US" sz="1100" dirty="0">
+                <a:solidFill>
+                  <a:srgbClr val="5B6472"/>
+                </a:solidFill>
+                <a:latin typeface="Aptos"/>
+                <a:cs typeface="Aptos"/>
+              </a:rPr>
+              <a:t>noisy lines can fail the threshold</a:t>
+            </a:r>
+          </a:p>
+        </p:txBody>
+      </p:sp>
+      <p:sp>
+        <p:nvSpPr>
+          <p:cNvPr id="59" name="rect"/>
+          <p:cNvSpPr/>
+          <p:nvPr/>
+        </p:nvSpPr>
+        <p:spPr>
+          <a:xfrm>
+            <a:off x="7522464" y="5027083"/>
+            <a:ext cx="4059936" cy="410633"/>
+          </a:xfrm>
+          <a:prstGeom prst="rect">
+            <a:avLst/>
+          </a:prstGeom>
+          <a:solidFill>
+            <a:srgbClr val="F1F5F2"/>
+          </a:solidFill>
+          <a:ln w="9525">
+            <a:solidFill>
+              <a:srgbClr val="D7D7CC"/>
+            </a:solidFill>
+          </a:ln>
+        </p:spPr>
+      </p:sp>
+      <p:sp>
+        <p:nvSpPr>
+          <p:cNvPr id="60" name="text"/>
+          <p:cNvSpPr txBox="1"/>
+          <p:nvPr/>
+        </p:nvSpPr>
+        <p:spPr>
+          <a:xfrm>
+            <a:off x="7598664" y="5084233"/>
+            <a:ext cx="3907536" cy="315383"/>
+          </a:xfrm>
+          <a:prstGeom prst="rect">
+            <a:avLst/>
+          </a:prstGeom>
+          <a:noFill/>
+          <a:ln>
+            <a:noFill/>
+          </a:ln>
+        </p:spPr>
+        <p:txBody>
+          <a:bodyPr wrap="square" anchor="ctr" lIns="0" tIns="0" rIns="0" bIns="0">
+            <a:spAutoFit/>
+          </a:bodyPr>
+          <a:lstStyle/>
+          <a:p>
+            <a:pPr algn="l"/>
+            <a:r>
+              <a:rPr lang="en-US" sz="1100" dirty="0">
+                <a:solidFill>
+                  <a:srgbClr val="5B6472"/>
+                </a:solidFill>
+                <a:latin typeface="Aptos"/>
+                <a:cs typeface="Aptos"/>
+              </a:rPr>
+              <a:t>configurable fallback; default max-gradient point</a:t>
+            </a:r>
+          </a:p>
+        </p:txBody>
+      </p:sp>
+      <p:sp>
+        <p:nvSpPr>
+          <p:cNvPr id="61" name="rect"/>
+          <p:cNvSpPr/>
+          <p:nvPr/>
+        </p:nvSpPr>
+        <p:spPr>
+          <a:xfrm>
+            <a:off x="609600" y="5437717"/>
+            <a:ext cx="2852928" cy="410633"/>
+          </a:xfrm>
+          <a:prstGeom prst="rect">
+            <a:avLst/>
+          </a:prstGeom>
+          <a:solidFill>
+            <a:srgbClr val="FFFFFF"/>
+          </a:solidFill>
+          <a:ln w="9525">
+            <a:solidFill>
+              <a:srgbClr val="D7D7CC"/>
+            </a:solidFill>
+          </a:ln>
+        </p:spPr>
+      </p:sp>
+      <p:sp>
+        <p:nvSpPr>
+          <p:cNvPr id="62" name="text"/>
+          <p:cNvSpPr txBox="1"/>
+          <p:nvPr/>
+        </p:nvSpPr>
+        <p:spPr>
+          <a:xfrm>
+            <a:off x="685800" y="5494867"/>
+            <a:ext cx="2700528" cy="315383"/>
+          </a:xfrm>
+          <a:prstGeom prst="rect">
+            <a:avLst/>
+          </a:prstGeom>
+          <a:noFill/>
+          <a:ln>
+            <a:noFill/>
+          </a:ln>
+        </p:spPr>
+        <p:txBody>
+          <a:bodyPr wrap="square" anchor="ctr" lIns="0" tIns="0" rIns="0" bIns="0">
+            <a:spAutoFit/>
+          </a:bodyPr>
+          <a:lstStyle/>
+          <a:p>
+            <a:pPr algn="l"/>
+            <a:r>
+              <a:rPr lang="en-US" sz="1100" b="1" dirty="0">
+                <a:solidFill>
+                  <a:srgbClr val="111827"/>
+                </a:solidFill>
+                <a:latin typeface="Aptos"/>
+                <a:cs typeface="Aptos"/>
+              </a:rPr>
               <a:t>Coordinate convention</a:t>
             </a:r>
           </a:p>
@@ -22984,20 +23251,20 @@
       </p:sp>
       <p:sp>
         <p:nvSpPr>
-          <p:cNvPr id="57" name="rect"/>
-          <p:cNvSpPr/>
-          <p:nvPr/>
-        </p:nvSpPr>
-        <p:spPr>
-          <a:xfrm>
-            <a:off x="3462528" y="5386388"/>
-            <a:ext cx="4059936" cy="461962"/>
-          </a:xfrm>
-          <a:prstGeom prst="rect">
-            <a:avLst/>
-          </a:prstGeom>
-          <a:solidFill>
-            <a:srgbClr val="F1F5F2"/>
+          <p:cNvPr id="63" name="rect"/>
+          <p:cNvSpPr/>
+          <p:nvPr/>
+        </p:nvSpPr>
+        <p:spPr>
+          <a:xfrm>
+            <a:off x="3462528" y="5437717"/>
+            <a:ext cx="4059936" cy="410633"/>
+          </a:xfrm>
+          <a:prstGeom prst="rect">
+            <a:avLst/>
+          </a:prstGeom>
+          <a:solidFill>
+            <a:srgbClr val="FFFFFF"/>
           </a:solidFill>
           <a:ln w="9525">
             <a:solidFill>
@@ -23008,14 +23275,14 @@
       </p:sp>
       <p:sp>
         <p:nvSpPr>
-          <p:cNvPr id="58" name="text"/>
-          <p:cNvSpPr txBox="1"/>
-          <p:nvPr/>
-        </p:nvSpPr>
-        <p:spPr>
-          <a:xfrm>
-            <a:off x="3538728" y="5443538"/>
-            <a:ext cx="3907536" cy="366712"/>
+          <p:cNvPr id="64" name="text"/>
+          <p:cNvSpPr txBox="1"/>
+          <p:nvPr/>
+        </p:nvSpPr>
+        <p:spPr>
+          <a:xfrm>
+            <a:off x="3538728" y="5494867"/>
+            <a:ext cx="3907536" cy="315383"/>
           </a:xfrm>
           <a:prstGeom prst="rect">
             <a:avLst/>
@@ -23047,20 +23314,20 @@
       </p:sp>
       <p:sp>
         <p:nvSpPr>
-          <p:cNvPr id="59" name="rect"/>
-          <p:cNvSpPr/>
-          <p:nvPr/>
-        </p:nvSpPr>
-        <p:spPr>
-          <a:xfrm>
-            <a:off x="7522464" y="5386388"/>
-            <a:ext cx="4059936" cy="461962"/>
-          </a:xfrm>
-          <a:prstGeom prst="rect">
-            <a:avLst/>
-          </a:prstGeom>
-          <a:solidFill>
-            <a:srgbClr val="F1F5F2"/>
+          <p:cNvPr id="65" name="rect"/>
+          <p:cNvSpPr/>
+          <p:nvPr/>
+        </p:nvSpPr>
+        <p:spPr>
+          <a:xfrm>
+            <a:off x="7522464" y="5437717"/>
+            <a:ext cx="4059936" cy="410633"/>
+          </a:xfrm>
+          <a:prstGeom prst="rect">
+            <a:avLst/>
+          </a:prstGeom>
+          <a:solidFill>
+            <a:srgbClr val="FFFFFF"/>
           </a:solidFill>
           <a:ln w="9525">
             <a:solidFill>
@@ -23071,14 +23338,14 @@
       </p:sp>
       <p:sp>
         <p:nvSpPr>
-          <p:cNvPr id="60" name="text"/>
-          <p:cNvSpPr txBox="1"/>
-          <p:nvPr/>
-        </p:nvSpPr>
-        <p:spPr>
-          <a:xfrm>
-            <a:off x="7598664" y="5443538"/>
-            <a:ext cx="3907536" cy="366712"/>
+          <p:cNvPr id="66" name="text"/>
+          <p:cNvSpPr txBox="1"/>
+          <p:nvPr/>
+        </p:nvSpPr>
+        <p:spPr>
+          <a:xfrm>
+            <a:off x="7598664" y="5494867"/>
+            <a:ext cx="3907536" cy="315383"/>
           </a:xfrm>
           <a:prstGeom prst="rect">
             <a:avLst/>
@@ -23110,7 +23377,7 @@
       </p:sp>
       <p:sp>
         <p:nvSpPr>
-          <p:cNvPr id="61" name="text"/>
+          <p:cNvPr id="67" name="text"/>
           <p:cNvSpPr txBox="1"/>
           <p:nvPr/>
         </p:nvSpPr>
@@ -23149,7 +23416,7 @@
       </p:sp>
       <p:sp>
         <p:nvSpPr>
-          <p:cNvPr id="62" name="text"/>
+          <p:cNvPr id="68" name="text"/>
           <p:cNvSpPr txBox="1"/>
           <p:nvPr/>
         </p:nvSpPr>

--- a/outputs/ieps_scf_final_presentation.pptx
+++ b/outputs/ieps_scf_final_presentation.pptx
@@ -2259,7 +2259,7 @@
         <p:spPr>
           <a:xfrm>
             <a:off x="9525000" y="2333625"/>
-            <a:ext cx="549783" cy="349250"/>
+            <a:ext cx="903161" cy="349250"/>
           </a:xfrm>
           <a:prstGeom prst="rect">
             <a:avLst/>
@@ -2308,7 +2308,7 @@
                 <a:latin typeface="Aptos"/>
                 <a:cs typeface="Aptos"/>
               </a:rPr>
-              <a:t>57.7%</a:t>
+              <a:t>94.8%</a:t>
             </a:r>
           </a:p>
         </p:txBody>
@@ -2385,7 +2385,7 @@
         <p:spPr>
           <a:xfrm>
             <a:off x="9525000" y="2911475"/>
-            <a:ext cx="562737" cy="349250"/>
+            <a:ext cx="903161" cy="349250"/>
           </a:xfrm>
           <a:prstGeom prst="rect">
             <a:avLst/>
@@ -2434,7 +2434,7 @@
                 <a:latin typeface="Aptos"/>
                 <a:cs typeface="Aptos"/>
               </a:rPr>
-              <a:t>59.1%</a:t>
+              <a:t>94.8%</a:t>
             </a:r>
           </a:p>
         </p:txBody>
@@ -2511,7 +2511,7 @@
         <p:spPr>
           <a:xfrm>
             <a:off x="9525000" y="3489325"/>
-            <a:ext cx="565309" cy="349250"/>
+            <a:ext cx="904304" cy="349250"/>
           </a:xfrm>
           <a:prstGeom prst="rect">
             <a:avLst/>
@@ -2560,7 +2560,7 @@
                 <a:latin typeface="Aptos"/>
                 <a:cs typeface="Aptos"/>
               </a:rPr>
-              <a:t>59.4%</a:t>
+              <a:t>94.9%</a:t>
             </a:r>
           </a:p>
         </p:txBody>
@@ -2676,7 +2676,7 @@
         <p:spPr>
           <a:xfrm>
             <a:off x="9525000" y="4695825"/>
-            <a:ext cx="584359" cy="177800"/>
+            <a:ext cx="896493" cy="177800"/>
           </a:xfrm>
           <a:prstGeom prst="rect">
             <a:avLst/>
@@ -2725,7 +2725,7 @@
                 <a:latin typeface="Aptos"/>
                 <a:cs typeface="Aptos"/>
               </a:rPr>
-              <a:t>61.4%</a:t>
+              <a:t>94.1%</a:t>
             </a:r>
           </a:p>
         </p:txBody>
@@ -2802,7 +2802,7 @@
         <p:spPr>
           <a:xfrm>
             <a:off x="9525000" y="5102225"/>
-            <a:ext cx="564356" cy="177800"/>
+            <a:ext cx="894016" cy="177800"/>
           </a:xfrm>
           <a:prstGeom prst="rect">
             <a:avLst/>
@@ -2851,7 +2851,7 @@
                 <a:latin typeface="Aptos"/>
                 <a:cs typeface="Aptos"/>
               </a:rPr>
-              <a:t>59.2%</a:t>
+              <a:t>93.9%</a:t>
             </a:r>
           </a:p>
         </p:txBody>
@@ -2928,7 +2928,7 @@
         <p:spPr>
           <a:xfrm>
             <a:off x="9525000" y="5508625"/>
-            <a:ext cx="562737" cy="177800"/>
+            <a:ext cx="903161" cy="177800"/>
           </a:xfrm>
           <a:prstGeom prst="rect">
             <a:avLst/>
@@ -2977,7 +2977,7 @@
                 <a:latin typeface="Aptos"/>
                 <a:cs typeface="Aptos"/>
               </a:rPr>
-              <a:t>59.1%</a:t>
+              <a:t>94.8%</a:t>
             </a:r>
           </a:p>
         </p:txBody>
@@ -4505,7 +4505,7 @@
                 <a:latin typeface="Aptos"/>
                 <a:cs typeface="Aptos"/>
               </a:rPr>
-              <a:t>61.4%</a:t>
+              <a:t>94.1%</a:t>
             </a:r>
           </a:p>
         </p:txBody>
@@ -4568,7 +4568,7 @@
                 <a:latin typeface="Aptos"/>
                 <a:cs typeface="Aptos"/>
               </a:rPr>
-              <a:t>70.0%</a:t>
+              <a:t>99.8%</a:t>
             </a:r>
           </a:p>
         </p:txBody>
@@ -4631,7 +4631,7 @@
                 <a:latin typeface="Aptos"/>
                 <a:cs typeface="Aptos"/>
               </a:rPr>
-              <a:t>+8.7 pts</a:t>
+              <a:t>+5.6 pts</a:t>
             </a:r>
           </a:p>
         </p:txBody>
@@ -4694,7 +4694,7 @@
                 <a:latin typeface="Aptos"/>
                 <a:cs typeface="Aptos"/>
               </a:rPr>
-              <a:t>78.1%</a:t>
+              <a:t>100.0%</a:t>
             </a:r>
           </a:p>
         </p:txBody>
@@ -4757,7 +4757,7 @@
                 <a:latin typeface="Aptos"/>
                 <a:cs typeface="Aptos"/>
               </a:rPr>
-              <a:t>93.8%</a:t>
+              <a:t>100.0%</a:t>
             </a:r>
           </a:p>
         </p:txBody>
@@ -4883,7 +4883,7 @@
                 <a:latin typeface="Aptos"/>
                 <a:cs typeface="Aptos"/>
               </a:rPr>
-              <a:t>59.1%</a:t>
+              <a:t>94.8%</a:t>
             </a:r>
           </a:p>
         </p:txBody>
@@ -4946,7 +4946,7 @@
                 <a:latin typeface="Aptos"/>
                 <a:cs typeface="Aptos"/>
               </a:rPr>
-              <a:t>69.7%</a:t>
+              <a:t>99.9%</a:t>
             </a:r>
           </a:p>
         </p:txBody>
@@ -5009,7 +5009,7 @@
                 <a:latin typeface="Aptos"/>
                 <a:cs typeface="Aptos"/>
               </a:rPr>
-              <a:t>+10.6 pts</a:t>
+              <a:t>+5.1 pts</a:t>
             </a:r>
           </a:p>
         </p:txBody>
@@ -5072,7 +5072,7 @@
                 <a:latin typeface="Aptos"/>
                 <a:cs typeface="Aptos"/>
               </a:rPr>
-              <a:t>78.1%</a:t>
+              <a:t>100.0%</a:t>
             </a:r>
           </a:p>
         </p:txBody>
@@ -5135,7 +5135,7 @@
                 <a:latin typeface="Aptos"/>
                 <a:cs typeface="Aptos"/>
               </a:rPr>
-              <a:t>93.8%</a:t>
+              <a:t>100.0%</a:t>
             </a:r>
           </a:p>
         </p:txBody>
@@ -5883,7 +5883,7 @@
                 <a:latin typeface="Aptos"/>
                 <a:cs typeface="Aptos"/>
               </a:rPr>
-              <a:t>59.1%</a:t>
+              <a:t>94.8%</a:t>
             </a:r>
           </a:p>
         </p:txBody>
@@ -5946,7 +5946,7 @@
                 <a:latin typeface="Aptos"/>
                 <a:cs typeface="Aptos"/>
               </a:rPr>
-              <a:t>9.3 ms</a:t>
+              <a:t>7.0 ms</a:t>
             </a:r>
           </a:p>
         </p:txBody>
@@ -6135,7 +6135,7 @@
                 <a:latin typeface="Aptos"/>
                 <a:cs typeface="Aptos"/>
               </a:rPr>
-              <a:t>61.1%</a:t>
+              <a:t>99.1%</a:t>
             </a:r>
           </a:p>
         </p:txBody>
@@ -6198,7 +6198,7 @@
                 <a:latin typeface="Aptos"/>
                 <a:cs typeface="Aptos"/>
               </a:rPr>
-              <a:t>166.5 ms</a:t>
+              <a:t>81.9 ms</a:t>
             </a:r>
           </a:p>
         </p:txBody>
@@ -6387,7 +6387,7 @@
                 <a:latin typeface="Aptos"/>
                 <a:cs typeface="Aptos"/>
               </a:rPr>
-              <a:t>61.2%</a:t>
+              <a:t>98.8%</a:t>
             </a:r>
           </a:p>
         </p:txBody>
@@ -6450,7 +6450,7 @@
                 <a:latin typeface="Aptos"/>
                 <a:cs typeface="Aptos"/>
               </a:rPr>
-              <a:t>1824.5 ms</a:t>
+              <a:t>795.9 ms</a:t>
             </a:r>
           </a:p>
         </p:txBody>
@@ -19549,7 +19549,7 @@
         <p:spPr>
           <a:xfrm>
             <a:off x="2190750" y="3400425"/>
-            <a:ext cx="1753076" cy="400050"/>
+            <a:ext cx="2689479" cy="400050"/>
           </a:xfrm>
           <a:prstGeom prst="rect">
             <a:avLst/>
@@ -19598,7 +19598,7 @@
                 <a:latin typeface="Aptos"/>
                 <a:cs typeface="Aptos"/>
               </a:rPr>
-              <a:t>61.4%</a:t>
+              <a:t>94.1%</a:t>
             </a:r>
           </a:p>
         </p:txBody>
@@ -19675,7 +19675,7 @@
         <p:spPr>
           <a:xfrm>
             <a:off x="2190750" y="4029075"/>
-            <a:ext cx="1688211" cy="400050"/>
+            <a:ext cx="2709482" cy="400050"/>
           </a:xfrm>
           <a:prstGeom prst="rect">
             <a:avLst/>
@@ -19724,7 +19724,7 @@
                 <a:latin typeface="Aptos"/>
                 <a:cs typeface="Aptos"/>
               </a:rPr>
-              <a:t>59.1%</a:t>
+              <a:t>94.8%</a:t>
             </a:r>
           </a:p>
         </p:txBody>
@@ -20092,7 +20092,7 @@
         <p:spPr>
           <a:xfrm>
             <a:off x="7943850" y="3400425"/>
-            <a:ext cx="2083460" cy="400050"/>
+            <a:ext cx="2667000" cy="400050"/>
           </a:xfrm>
           <a:prstGeom prst="rect">
             <a:avLst/>
@@ -20141,7 +20141,7 @@
                 <a:latin typeface="Aptos"/>
                 <a:cs typeface="Aptos"/>
               </a:rPr>
-              <a:t>78.1%</a:t>
+              <a:t>100.0%</a:t>
             </a:r>
           </a:p>
         </p:txBody>
@@ -20218,7 +20218,7 @@
         <p:spPr>
           <a:xfrm>
             <a:off x="7943850" y="4029075"/>
-            <a:ext cx="2083460" cy="400050"/>
+            <a:ext cx="2667000" cy="400050"/>
           </a:xfrm>
           <a:prstGeom prst="rect">
             <a:avLst/>
@@ -20267,7 +20267,7 @@
                 <a:latin typeface="Aptos"/>
                 <a:cs typeface="Aptos"/>
               </a:rPr>
-              <a:t>78.1%</a:t>
+              <a:t>100.0%</a:t>
             </a:r>
           </a:p>
         </p:txBody>
@@ -20897,7 +20897,7 @@
                 <a:latin typeface="Aptos"/>
                 <a:cs typeface="Aptos"/>
               </a:rPr>
-              <a:t>8.1 ms</a:t>
+              <a:t>7.0 ms</a:t>
             </a:r>
           </a:p>
         </p:txBody>
@@ -21023,7 +21023,7 @@
                 <a:latin typeface="Aptos"/>
                 <a:cs typeface="Aptos"/>
               </a:rPr>
-              <a:t>78.1%</a:t>
+              <a:t>100.0%</a:t>
             </a:r>
           </a:p>
         </p:txBody>
@@ -21086,7 +21086,7 @@
                 <a:latin typeface="Aptos"/>
                 <a:cs typeface="Aptos"/>
               </a:rPr>
-              <a:t>59.1%</a:t>
+              <a:t>94.8%</a:t>
             </a:r>
           </a:p>
         </p:txBody>
@@ -21212,7 +21212,7 @@
                 <a:latin typeface="Aptos"/>
                 <a:cs typeface="Aptos"/>
               </a:rPr>
-              <a:t>9.3 ms</a:t>
+              <a:t>7.0 ms</a:t>
             </a:r>
           </a:p>
         </p:txBody>

--- a/outputs/ieps_scf_final_presentation.pptx
+++ b/outputs/ieps_scf_final_presentation.pptx
@@ -5946,7 +5946,7 @@
                 <a:latin typeface="Aptos"/>
                 <a:cs typeface="Aptos"/>
               </a:rPr>
-              <a:t>7.0 ms</a:t>
+              <a:t>9.7 ms</a:t>
             </a:r>
           </a:p>
         </p:txBody>
@@ -20897,7 +20897,7 @@
                 <a:latin typeface="Aptos"/>
                 <a:cs typeface="Aptos"/>
               </a:rPr>
-              <a:t>7.0 ms</a:t>
+              <a:t>14.4 ms</a:t>
             </a:r>
           </a:p>
         </p:txBody>
@@ -21212,7 +21212,7 @@
                 <a:latin typeface="Aptos"/>
                 <a:cs typeface="Aptos"/>
               </a:rPr>
-              <a:t>7.0 ms</a:t>
+              <a:t>9.7 ms</a:t>
             </a:r>
           </a:p>
         </p:txBody>

--- a/outputs/ieps_scf_final_presentation.pptx
+++ b/outputs/ieps_scf_final_presentation.pptx
@@ -8142,7 +8142,7 @@
                 <a:latin typeface="Consolas"/>
                 <a:cs typeface="Consolas"/>
               </a:rPr>
-              <a:t>    angle = 2.0 * math.pi * i / initial_scan_lines</a:t>
+              <a:t>    angle = 2.0 * math.pi * i / initial_scan_lines</a:t>
             </a:r>
           </a:p>
         </p:txBody>
@@ -8179,7 +8179,7 @@
                 <a:latin typeface="Consolas"/>
                 <a:cs typeface="Consolas"/>
               </a:rPr>
-              <a:t>    ray = sample_ray_from_center(center, angle, image.shape)</a:t>
+              <a:t>    ray = sample_ray_from_center(center, angle, image.shape)</a:t>
             </a:r>
           </a:p>
         </p:txBody>
@@ -8216,7 +8216,7 @@
                 <a:latin typeface="Consolas"/>
                 <a:cs typeface="Consolas"/>
               </a:rPr>
-              <a:t>    candidates = [p for p in ray if gradient[p[1], p[0]] &gt;= threshold]   # Eq. (3)</a:t>
+              <a:t>    candidates = [p for p in ray if gradient[p[1], p[0]] &gt;= threshold]   # Eq. (3)</a:t>
             </a:r>
           </a:p>
         </p:txBody>
@@ -8253,7 +8253,7 @@
                 <a:latin typeface="Consolas"/>
                 <a:cs typeface="Consolas"/>
               </a:rPr>
-              <a:t>    if candidates:</a:t>
+              <a:t>    if candidates:</a:t>
             </a:r>
           </a:p>
         </p:txBody>
@@ -8290,7 +8290,7 @@
                 <a:latin typeface="Consolas"/>
                 <a:cs typeface="Consolas"/>
               </a:rPr>
-              <a:t>        points.append(max(candidates, key=lambda p: distance(p, center)))</a:t>
+              <a:t>        points.append(max(candidates, key=lambda p: distance(p, center)))</a:t>
             </a:r>
           </a:p>
         </p:txBody>
@@ -8438,7 +8438,7 @@
                 <a:latin typeface="Consolas"/>
                 <a:cs typeface="Consolas"/>
               </a:rPr>
-              <a:t>    radius = max(3.0, default_scan_distance / 2.0 ** iteration)   # Eq. (7)</a:t>
+              <a:t>    radius = max(3.0, default_scan_distance / 2.0 ** iteration)   # Eq. (7)</a:t>
             </a:r>
           </a:p>
         </p:txBody>
@@ -8475,7 +8475,7 @@
                 <a:latin typeface="Consolas"/>
                 <a:cs typeface="Consolas"/>
               </a:rPr>
-              <a:t>    next_points = []</a:t>
+              <a:t>    next_points = []</a:t>
             </a:r>
           </a:p>
         </p:txBody>
@@ -8512,7 +8512,7 @@
                 <a:latin typeface="Consolas"/>
                 <a:cs typeface="Consolas"/>
               </a:rPr>
-              <a:t>    for idx in range(len(points)):</a:t>
+              <a:t>    for idx in range(len(points)):</a:t>
             </a:r>
           </a:p>
         </p:txBody>
@@ -8549,7 +8549,7 @@
                 <a:latin typeface="Consolas"/>
                 <a:cs typeface="Consolas"/>
               </a:rPr>
-              <a:t>        p1, p2 = points[idx], points[(idx + 1) % len(points)]</a:t>
+              <a:t>        p1, p2 = points[idx], points[(idx + 1) % len(points)]</a:t>
             </a:r>
           </a:p>
         </p:txBody>
@@ -8586,7 +8586,7 @@
                 <a:latin typeface="Consolas"/>
                 <a:cs typeface="Consolas"/>
               </a:rPr>
-              <a:t>        mid = midpoint(p1, p2)                                    # Eq. (5)</a:t>
+              <a:t>        mid = midpoint(p1, p2)                                    # Eq. (5)</a:t>
             </a:r>
           </a:p>
         </p:txBody>
@@ -8623,7 +8623,7 @@
                 <a:latin typeface="Consolas"/>
                 <a:cs typeface="Consolas"/>
               </a:rPr>
-              <a:t>        normal = normal_vector(p1, p2)                            # Eq. (6)</a:t>
+              <a:t>        normal = normal_vector(p1, p2)                            # Eq. (6)</a:t>
             </a:r>
           </a:p>
         </p:txBody>
@@ -8660,7 +8660,7 @@
                 <a:latin typeface="Consolas"/>
                 <a:cs typeface="Consolas"/>
               </a:rPr>
-              <a:t>        scan = sample_line_through_point(mid, normal, image.shape, radius)</a:t>
+              <a:t>        scan = sample_line_through_point(mid, normal, image.shape, radius)</a:t>
             </a:r>
           </a:p>
         </p:txBody>
@@ -8697,7 +8697,7 @@
                 <a:latin typeface="Consolas"/>
                 <a:cs typeface="Consolas"/>
               </a:rPr>
-              <a:t>        selected = select_edge_candidate(scan, gradient, threshold, fallback)</a:t>
+              <a:t>        selected = select_edge_candidate(scan, gradient, threshold, fallback)</a:t>
             </a:r>
           </a:p>
         </p:txBody>
@@ -8734,7 +8734,7 @@
                 <a:latin typeface="Consolas"/>
                 <a:cs typeface="Consolas"/>
               </a:rPr>
-              <a:t>        next_points.append(p1)</a:t>
+              <a:t>        next_points.append(p1)</a:t>
             </a:r>
           </a:p>
         </p:txBody>
@@ -8771,7 +8771,7 @@
                 <a:latin typeface="Consolas"/>
                 <a:cs typeface="Consolas"/>
               </a:rPr>
-              <a:t>        if selected is not None:</a:t>
+              <a:t>        if selected is not None:</a:t>
             </a:r>
           </a:p>
         </p:txBody>
@@ -8808,7 +8808,7 @@
                 <a:latin typeface="Consolas"/>
                 <a:cs typeface="Consolas"/>
               </a:rPr>
-              <a:t>            next_points.append(selected)    # new point stays between its parents</a:t>
+              <a:t>            next_points.append(selected)    # new point stays between its parents</a:t>
             </a:r>
           </a:p>
         </p:txBody>
@@ -8845,7 +8845,7 @@
                 <a:latin typeface="Consolas"/>
                 <a:cs typeface="Consolas"/>
               </a:rPr>
-              <a:t>    points = unique_preserve_order(next_points)      # N * 2**p  -&gt;  32 points</a:t>
+              <a:t>    points = unique_preserve_order(next_points)      # N * 2**p  -&gt;  32 points</a:t>
             </a:r>
           </a:p>
         </p:txBody>
@@ -9238,7 +9238,7 @@
                 <a:latin typeface="Consolas"/>
                 <a:cs typeface="Consolas"/>
               </a:rPr>
-              <a:t>    max_steps = max(5, math.ceil(3.0 * distance(start, target)))   # step guard</a:t>
+              <a:t>    max_steps = max(5, math.ceil(3.0 * distance(start, target)))   # step guard</a:t>
             </a:r>
           </a:p>
         </p:txBody>
@@ -9275,7 +9275,7 @@
                 <a:latin typeface="Consolas"/>
                 <a:cs typeface="Consolas"/>
               </a:rPr>
-              <a:t>    current, path, visited = start, [start], {start}</a:t>
+              <a:t>    current, path, visited = start, [start], {start}</a:t>
             </a:r>
           </a:p>
         </p:txBody>
@@ -9312,7 +9312,7 @@
                 <a:latin typeface="Consolas"/>
                 <a:cs typeface="Consolas"/>
               </a:rPr>
-              <a:t>    for _ in range(max_steps):</a:t>
+              <a:t>    for _ in range(max_steps):</a:t>
             </a:r>
           </a:p>
         </p:txBody>
@@ -9349,7 +9349,7 @@
                 <a:latin typeface="Consolas"/>
                 <a:cs typeface="Consolas"/>
               </a:rPr>
-              <a:t>        if distance(current, target) &lt;= tol:                # explicit stop rule</a:t>
+              <a:t>        if distance(current, target) &lt;= tol:                # explicit stop rule</a:t>
             </a:r>
           </a:p>
         </p:txBody>
@@ -9386,7 +9386,7 @@
                 <a:latin typeface="Consolas"/>
                 <a:cs typeface="Consolas"/>
               </a:rPr>
-              <a:t>            break</a:t>
+              <a:t>            break</a:t>
             </a:r>
           </a:p>
         </p:txBody>
@@ -9423,7 +9423,7 @@
                 <a:latin typeface="Consolas"/>
                 <a:cs typeface="Consolas"/>
               </a:rPr>
-              <a:t>        cands = directional_candidates(current, target)     # 3-pixel mask, Fig. 4</a:t>
+              <a:t>        cands = directional_candidates(current, target)     # 3-pixel mask, Fig. 4</a:t>
             </a:r>
           </a:p>
         </p:txBody>
@@ -9460,7 +9460,7 @@
                 <a:latin typeface="Consolas"/>
                 <a:cs typeface="Consolas"/>
               </a:rPr>
-              <a:t>        cands = [p for p in cands if p not in visited] or cands    # no loops</a:t>
+              <a:t>        cands = [p for p in cands if p not in visited] or cands    # no loops</a:t>
             </a:r>
           </a:p>
         </p:txBody>
@@ -9497,7 +9497,7 @@
                 <a:latin typeface="Consolas"/>
                 <a:cs typeface="Consolas"/>
               </a:rPr>
-              <a:t>        if max(grad(p) for p in cands) &lt; 1.0:               # broken edge?</a:t>
+              <a:t>        if max(grad(p) for p in cands) &lt; 1.0:               # broken edge?</a:t>
             </a:r>
           </a:p>
         </p:txBody>
@@ -9534,7 +9534,7 @@
                 <a:latin typeface="Consolas"/>
                 <a:cs typeface="Consolas"/>
               </a:rPr>
-              <a:t>            best = min(cands, key=lambda p: distance(p, target))   # fallback</a:t>
+              <a:t>            best = min(cands, key=lambda p: distance(p, target))   # fallback</a:t>
             </a:r>
           </a:p>
         </p:txBody>
@@ -9571,7 +9571,7 @@
                 <a:latin typeface="Consolas"/>
                 <a:cs typeface="Consolas"/>
               </a:rPr>
-              <a:t>        else:</a:t>
+              <a:t>        else:</a:t>
             </a:r>
           </a:p>
         </p:txBody>
@@ -9608,7 +9608,7 @@
                 <a:latin typeface="Consolas"/>
                 <a:cs typeface="Consolas"/>
               </a:rPr>
-              <a:t>            best = max(cands, key=lambda p: (</a:t>
+              <a:t>            best = max(cands, key=lambda p: (</a:t>
             </a:r>
           </a:p>
         </p:txBody>
@@ -9645,7 +9645,7 @@
                 <a:latin typeface="Consolas"/>
                 <a:cs typeface="Consolas"/>
               </a:rPr>
-              <a:t>                grad(p) / (distance(p, target) ** 2 + 1.0),  # gravity ~ Eq. (9)</a:t>
+              <a:t>                grad(p) / (distance(p, target) ** 2 + 1.0),  # gravity ~ Eq. (9)</a:t>
             </a:r>
           </a:p>
         </p:txBody>
@@ -9682,7 +9682,7 @@
                 <a:latin typeface="Consolas"/>
                 <a:cs typeface="Consolas"/>
               </a:rPr>
-              <a:t>                grad(p),                                     # tie-break: gradient</a:t>
+              <a:t>                grad(p),                                     # tie-break: gradient</a:t>
             </a:r>
           </a:p>
         </p:txBody>
@@ -9719,7 +9719,7 @@
                 <a:latin typeface="Consolas"/>
                 <a:cs typeface="Consolas"/>
               </a:rPr>
-              <a:t>                -distance(p, target)))                       # tie-break: distance</a:t>
+              <a:t>                -distance(p, target)))                       # tie-break: distance</a:t>
             </a:r>
           </a:p>
         </p:txBody>
@@ -9756,7 +9756,7 @@
                 <a:latin typeface="Consolas"/>
                 <a:cs typeface="Consolas"/>
               </a:rPr>
-              <a:t>        current = best</a:t>
+              <a:t>        current = best</a:t>
             </a:r>
           </a:p>
         </p:txBody>
@@ -9793,7 +9793,7 @@
                 <a:latin typeface="Consolas"/>
                 <a:cs typeface="Consolas"/>
               </a:rPr>
-              <a:t>        path.append(best)</a:t>
+              <a:t>        path.append(best)</a:t>
             </a:r>
           </a:p>
         </p:txBody>
@@ -9830,7 +9830,7 @@
                 <a:latin typeface="Consolas"/>
                 <a:cs typeface="Consolas"/>
               </a:rPr>
-              <a:t>        visited.add(best)</a:t>
+              <a:t>        visited.add(best)</a:t>
             </a:r>
           </a:p>
         </p:txBody>
@@ -9867,7 +9867,7 @@
                 <a:latin typeface="Consolas"/>
                 <a:cs typeface="Consolas"/>
               </a:rPr>
-              <a:t>    return path</a:t>
+              <a:t>    return path</a:t>
             </a:r>
           </a:p>
         </p:txBody>
@@ -10015,7 +10015,7 @@
                 <a:latin typeface="Consolas"/>
                 <a:cs typeface="Consolas"/>
               </a:rPr>
-              <a:t>    contour += trace_segment_greedy(grad, points[i], points[(i + 1) % len(points)])</a:t>
+              <a:t>    contour += trace_segment_greedy(grad, points[i], points[(i + 1) % len(points)])</a:t>
             </a:r>
           </a:p>
         </p:txBody>
@@ -13350,7 +13350,7 @@
         <p:spPr>
           <a:xfrm>
             <a:off x="6819900" y="4876800"/>
-            <a:ext cx="4762500" cy="1047750"/>
+            <a:ext cx="4762500" cy="1181100"/>
           </a:xfrm>
           <a:prstGeom prst="rect">
             <a:avLst/>
@@ -13374,7 +13374,7 @@
         <p:spPr>
           <a:xfrm>
             <a:off x="6819900" y="4876800"/>
-            <a:ext cx="57150" cy="1047750"/>
+            <a:ext cx="57150" cy="1181100"/>
           </a:xfrm>
           <a:prstGeom prst="rect">
             <a:avLst/>
@@ -13435,7 +13435,7 @@
         <p:spPr>
           <a:xfrm>
             <a:off x="6991350" y="5295900"/>
-            <a:ext cx="4457700" cy="514350"/>
+            <a:ext cx="4457700" cy="647700"/>
           </a:xfrm>
           <a:prstGeom prst="rect">
             <a:avLst/>
@@ -13458,7 +13458,7 @@
                 <a:latin typeface="Aptos"/>
                 <a:cs typeface="Aptos"/>
               </a:rPr>
-              <a:t>Real vase (Otsu proxy mask): paper-mode F1 93.8% in 14.8 ms. Yuen/Snake/Chen comparisons are labeled approximations; on these synthetic shapes they tie or nearly tie (Chen = proposed SCF at every SNR), so they are context, not evidence of the paper's reported gaps.</a:t>
+              <a:t>Real vase (Otsu proxy mask): paper-mode F1 93.8%. Yuen/Snake/Chen comparisons are labeled approximations; on these synthetic shapes they tie or nearly tie (Chen = proposed SCF at every SNR), so they are context, not evidence of the paper's reported gaps.</a:t>
             </a:r>
           </a:p>
         </p:txBody>

--- a/outputs/ieps_scf_final_presentation.pptx
+++ b/outputs/ieps_scf_final_presentation.pptx
@@ -15,6 +15,7 @@
     <p:sldId id="263" r:id="rId9"/>
     <p:sldId id="264" r:id="rId10"/>
     <p:sldId id="265" r:id="rId11"/>
+    <p:sldId id="266" r:id="rId12"/>
   </p:sldIdLst>
   <p:sldSz cx="12192000" cy="6858000" type="wide"/>
   <p:notesSz cx="6858000" cy="9144000"/>
@@ -644,7 +645,7 @@
                 <a:latin typeface="Aptos"/>
                 <a:cs typeface="Aptos"/>
               </a:rPr>
-              <a:t>CONCLUSION</a:t>
+              <a:t>RESULTS - REAL IMAGE</a:t>
             </a:r>
           </a:p>
         </p:txBody>
@@ -681,7 +682,7 @@
                 <a:latin typeface="Aptos"/>
                 <a:cs typeface="Aptos"/>
               </a:rPr>
-              <a:t>The method reproduces - once the missing rules are written down</a:t>
+              <a:t>Real vase: the paper's qualitative test</a:t>
             </a:r>
           </a:p>
         </p:txBody>
@@ -718,7 +719,7 @@
                 <a:latin typeface="Aptos"/>
                 <a:cs typeface="Aptos"/>
               </a:rPr>
-              <a:t>The reproducibility audit is the contribution: assumptions were made explicit, implemented, and measured.</a:t>
+              <a:t>data/vase.png with an Otsu-estimated proxy mask - metrics are qualitative support, not ground-truth evaluation.</a:t>
             </a:r>
           </a:p>
         </p:txBody>
@@ -747,6 +748,1421 @@
           </a:ln>
         </p:spPr>
       </p:sp>
+      <p:pic>
+        <p:nvPicPr>
+          <p:cNvPr id="7" name="image" descr="panel.png"/>
+          <p:cNvPicPr/>
+          <p:nvPr/>
+        </p:nvPicPr>
+        <p:blipFill>
+          <a:blip r:embed="rId1"/>
+          <a:stretch>
+            <a:fillRect/>
+          </a:stretch>
+        </p:blipFill>
+        <p:spPr>
+          <a:xfrm>
+            <a:off x="609600" y="1804988"/>
+            <a:ext cx="10972800" cy="2143125"/>
+          </a:xfrm>
+          <a:prstGeom prst="rect">
+            <a:avLst/>
+          </a:prstGeom>
+        </p:spPr>
+      </p:pic>
+      <p:sp>
+        <p:nvSpPr>
+          <p:cNvPr id="8" name="text"/>
+          <p:cNvSpPr txBox="1"/>
+          <p:nvPr/>
+        </p:nvSpPr>
+        <p:spPr>
+          <a:xfrm>
+            <a:off x="609600" y="4210050"/>
+            <a:ext cx="10972800" cy="209550"/>
+          </a:xfrm>
+          <a:prstGeom prst="rect">
+            <a:avLst/>
+          </a:prstGeom>
+          <a:noFill/>
+          <a:ln>
+            <a:noFill/>
+          </a:ln>
+        </p:spPr>
+        <p:txBody>
+          <a:bodyPr wrap="square" anchor="t" lIns="0" tIns="0" rIns="0" bIns="0"/>
+          <a:lstStyle/>
+          <a:p>
+            <a:pPr algn="ctr"/>
+            <a:r>
+              <a:rPr lang="en-US" sz="1100" dirty="0">
+                <a:solidFill>
+                  <a:srgbClr val="5B6472"/>
+                </a:solidFill>
+                <a:latin typeface="Aptos"/>
+                <a:cs typeface="Aptos"/>
+              </a:rPr>
+              <a:t>Paper-mode pipeline on the real vase: input, Sobel gradient, center of gravity, 32 IEPS points, SCF contour, proxy ground truth</a:t>
+            </a:r>
+          </a:p>
+        </p:txBody>
+      </p:sp>
+      <p:sp>
+        <p:nvSpPr>
+          <p:cNvPr id="9" name="rect"/>
+          <p:cNvSpPr/>
+          <p:nvPr/>
+        </p:nvSpPr>
+        <p:spPr>
+          <a:xfrm>
+            <a:off x="609600" y="4629150"/>
+            <a:ext cx="2628900" cy="304800"/>
+          </a:xfrm>
+          <a:prstGeom prst="rect">
+            <a:avLst/>
+          </a:prstGeom>
+          <a:solidFill>
+            <a:srgbClr val="101418"/>
+          </a:solidFill>
+          <a:ln w="9525">
+            <a:solidFill>
+              <a:srgbClr val="101418"/>
+            </a:solidFill>
+          </a:ln>
+        </p:spPr>
+      </p:sp>
+      <p:sp>
+        <p:nvSpPr>
+          <p:cNvPr id="10" name="text"/>
+          <p:cNvSpPr txBox="1"/>
+          <p:nvPr/>
+        </p:nvSpPr>
+        <p:spPr>
+          <a:xfrm>
+            <a:off x="685800" y="4686300"/>
+            <a:ext cx="2476500" cy="228600"/>
+          </a:xfrm>
+          <a:prstGeom prst="rect">
+            <a:avLst/>
+          </a:prstGeom>
+          <a:noFill/>
+          <a:ln>
+            <a:noFill/>
+          </a:ln>
+        </p:spPr>
+        <p:txBody>
+          <a:bodyPr wrap="square" anchor="ctr" lIns="0" tIns="0" rIns="0" bIns="0"/>
+          <a:lstStyle/>
+          <a:p>
+            <a:pPr algn="l"/>
+            <a:r>
+              <a:rPr lang="en-US" sz="1200" b="1" dirty="0">
+                <a:solidFill>
+                  <a:srgbClr val="FFFFFF"/>
+                </a:solidFill>
+                <a:latin typeface="Aptos"/>
+                <a:cs typeface="Aptos"/>
+              </a:rPr>
+              <a:t>Configuration</a:t>
+            </a:r>
+          </a:p>
+        </p:txBody>
+      </p:sp>
+      <p:sp>
+        <p:nvSpPr>
+          <p:cNvPr id="11" name="rect"/>
+          <p:cNvSpPr/>
+          <p:nvPr/>
+        </p:nvSpPr>
+        <p:spPr>
+          <a:xfrm>
+            <a:off x="3238500" y="4629150"/>
+            <a:ext cx="1183005" cy="304800"/>
+          </a:xfrm>
+          <a:prstGeom prst="rect">
+            <a:avLst/>
+          </a:prstGeom>
+          <a:solidFill>
+            <a:srgbClr val="101418"/>
+          </a:solidFill>
+          <a:ln w="9525">
+            <a:solidFill>
+              <a:srgbClr val="101418"/>
+            </a:solidFill>
+          </a:ln>
+        </p:spPr>
+      </p:sp>
+      <p:sp>
+        <p:nvSpPr>
+          <p:cNvPr id="12" name="text"/>
+          <p:cNvSpPr txBox="1"/>
+          <p:nvPr/>
+        </p:nvSpPr>
+        <p:spPr>
+          <a:xfrm>
+            <a:off x="3314700" y="4686300"/>
+            <a:ext cx="1030605" cy="228600"/>
+          </a:xfrm>
+          <a:prstGeom prst="rect">
+            <a:avLst/>
+          </a:prstGeom>
+          <a:noFill/>
+          <a:ln>
+            <a:noFill/>
+          </a:ln>
+        </p:spPr>
+        <p:txBody>
+          <a:bodyPr wrap="square" anchor="ctr" lIns="0" tIns="0" rIns="0" bIns="0"/>
+          <a:lstStyle/>
+          <a:p>
+            <a:pPr algn="l"/>
+            <a:r>
+              <a:rPr lang="en-US" sz="1200" b="1" dirty="0">
+                <a:solidFill>
+                  <a:srgbClr val="FFFFFF"/>
+                </a:solidFill>
+                <a:latin typeface="Aptos"/>
+                <a:cs typeface="Aptos"/>
+              </a:rPr>
+              <a:t>IEPS acc</a:t>
+            </a:r>
+          </a:p>
+        </p:txBody>
+      </p:sp>
+      <p:sp>
+        <p:nvSpPr>
+          <p:cNvPr id="13" name="rect"/>
+          <p:cNvSpPr/>
+          <p:nvPr/>
+        </p:nvSpPr>
+        <p:spPr>
+          <a:xfrm>
+            <a:off x="4421505" y="4629150"/>
+            <a:ext cx="1183005" cy="304800"/>
+          </a:xfrm>
+          <a:prstGeom prst="rect">
+            <a:avLst/>
+          </a:prstGeom>
+          <a:solidFill>
+            <a:srgbClr val="101418"/>
+          </a:solidFill>
+          <a:ln w="9525">
+            <a:solidFill>
+              <a:srgbClr val="101418"/>
+            </a:solidFill>
+          </a:ln>
+        </p:spPr>
+      </p:sp>
+      <p:sp>
+        <p:nvSpPr>
+          <p:cNvPr id="14" name="text"/>
+          <p:cNvSpPr txBox="1"/>
+          <p:nvPr/>
+        </p:nvSpPr>
+        <p:spPr>
+          <a:xfrm>
+            <a:off x="4497705" y="4686300"/>
+            <a:ext cx="1030605" cy="228600"/>
+          </a:xfrm>
+          <a:prstGeom prst="rect">
+            <a:avLst/>
+          </a:prstGeom>
+          <a:noFill/>
+          <a:ln>
+            <a:noFill/>
+          </a:ln>
+        </p:spPr>
+        <p:txBody>
+          <a:bodyPr wrap="square" anchor="ctr" lIns="0" tIns="0" rIns="0" bIns="0"/>
+          <a:lstStyle/>
+          <a:p>
+            <a:pPr algn="l"/>
+            <a:r>
+              <a:rPr lang="en-US" sz="1200" b="1" dirty="0">
+                <a:solidFill>
+                  <a:srgbClr val="FFFFFF"/>
+                </a:solidFill>
+                <a:latin typeface="Aptos"/>
+                <a:cs typeface="Aptos"/>
+              </a:rPr>
+              <a:t>F1 (proxy)</a:t>
+            </a:r>
+          </a:p>
+        </p:txBody>
+      </p:sp>
+      <p:sp>
+        <p:nvSpPr>
+          <p:cNvPr id="15" name="rect"/>
+          <p:cNvSpPr/>
+          <p:nvPr/>
+        </p:nvSpPr>
+        <p:spPr>
+          <a:xfrm>
+            <a:off x="5604510" y="4629150"/>
+            <a:ext cx="1577340" cy="304800"/>
+          </a:xfrm>
+          <a:prstGeom prst="rect">
+            <a:avLst/>
+          </a:prstGeom>
+          <a:solidFill>
+            <a:srgbClr val="101418"/>
+          </a:solidFill>
+          <a:ln w="9525">
+            <a:solidFill>
+              <a:srgbClr val="101418"/>
+            </a:solidFill>
+          </a:ln>
+        </p:spPr>
+      </p:sp>
+      <p:sp>
+        <p:nvSpPr>
+          <p:cNvPr id="16" name="text"/>
+          <p:cNvSpPr txBox="1"/>
+          <p:nvPr/>
+        </p:nvSpPr>
+        <p:spPr>
+          <a:xfrm>
+            <a:off x="5680710" y="4686300"/>
+            <a:ext cx="1424940" cy="228600"/>
+          </a:xfrm>
+          <a:prstGeom prst="rect">
+            <a:avLst/>
+          </a:prstGeom>
+          <a:noFill/>
+          <a:ln>
+            <a:noFill/>
+          </a:ln>
+        </p:spPr>
+        <p:txBody>
+          <a:bodyPr wrap="square" anchor="ctr" lIns="0" tIns="0" rIns="0" bIns="0"/>
+          <a:lstStyle/>
+          <a:p>
+            <a:pPr algn="l"/>
+            <a:r>
+              <a:rPr lang="en-US" sz="1200" b="1" dirty="0">
+                <a:solidFill>
+                  <a:srgbClr val="FFFFFF"/>
+                </a:solidFill>
+                <a:latin typeface="Aptos"/>
+                <a:cs typeface="Aptos"/>
+              </a:rPr>
+              <a:t>IEPS+SCF time</a:t>
+            </a:r>
+          </a:p>
+        </p:txBody>
+      </p:sp>
+      <p:sp>
+        <p:nvSpPr>
+          <p:cNvPr id="17" name="rect"/>
+          <p:cNvSpPr/>
+          <p:nvPr/>
+        </p:nvSpPr>
+        <p:spPr>
+          <a:xfrm>
+            <a:off x="609600" y="4933950"/>
+            <a:ext cx="2628900" cy="330200"/>
+          </a:xfrm>
+          <a:prstGeom prst="rect">
+            <a:avLst/>
+          </a:prstGeom>
+          <a:solidFill>
+            <a:srgbClr val="FFFFFF"/>
+          </a:solidFill>
+          <a:ln w="9525">
+            <a:solidFill>
+              <a:srgbClr val="D7D7CC"/>
+            </a:solidFill>
+          </a:ln>
+        </p:spPr>
+      </p:sp>
+      <p:sp>
+        <p:nvSpPr>
+          <p:cNvPr id="18" name="text"/>
+          <p:cNvSpPr txBox="1"/>
+          <p:nvPr/>
+        </p:nvSpPr>
+        <p:spPr>
+          <a:xfrm>
+            <a:off x="685800" y="4981575"/>
+            <a:ext cx="2476500" cy="254000"/>
+          </a:xfrm>
+          <a:prstGeom prst="rect">
+            <a:avLst/>
+          </a:prstGeom>
+          <a:noFill/>
+          <a:ln>
+            <a:noFill/>
+          </a:ln>
+        </p:spPr>
+        <p:txBody>
+          <a:bodyPr wrap="square" anchor="ctr" lIns="0" tIns="0" rIns="0" bIns="0"/>
+          <a:lstStyle/>
+          <a:p>
+            <a:pPr algn="l"/>
+            <a:r>
+              <a:rPr lang="en-US" sz="1200" b="1" dirty="0">
+                <a:solidFill>
+                  <a:srgbClr val="111827"/>
+                </a:solidFill>
+                <a:latin typeface="Aptos"/>
+                <a:cs typeface="Aptos"/>
+              </a:rPr>
+              <a:t>paper IEPS + greedy SCF</a:t>
+            </a:r>
+          </a:p>
+        </p:txBody>
+      </p:sp>
+      <p:sp>
+        <p:nvSpPr>
+          <p:cNvPr id="19" name="rect"/>
+          <p:cNvSpPr/>
+          <p:nvPr/>
+        </p:nvSpPr>
+        <p:spPr>
+          <a:xfrm>
+            <a:off x="3238500" y="4933950"/>
+            <a:ext cx="1183005" cy="330200"/>
+          </a:xfrm>
+          <a:prstGeom prst="rect">
+            <a:avLst/>
+          </a:prstGeom>
+          <a:solidFill>
+            <a:srgbClr val="FFFFFF"/>
+          </a:solidFill>
+          <a:ln w="9525">
+            <a:solidFill>
+              <a:srgbClr val="D7D7CC"/>
+            </a:solidFill>
+          </a:ln>
+        </p:spPr>
+      </p:sp>
+      <p:sp>
+        <p:nvSpPr>
+          <p:cNvPr id="20" name="text"/>
+          <p:cNvSpPr txBox="1"/>
+          <p:nvPr/>
+        </p:nvSpPr>
+        <p:spPr>
+          <a:xfrm>
+            <a:off x="3314700" y="4981575"/>
+            <a:ext cx="1030605" cy="254000"/>
+          </a:xfrm>
+          <a:prstGeom prst="rect">
+            <a:avLst/>
+          </a:prstGeom>
+          <a:noFill/>
+          <a:ln>
+            <a:noFill/>
+          </a:ln>
+        </p:spPr>
+        <p:txBody>
+          <a:bodyPr wrap="square" anchor="ctr" lIns="0" tIns="0" rIns="0" bIns="0"/>
+          <a:lstStyle/>
+          <a:p>
+            <a:pPr algn="l"/>
+            <a:r>
+              <a:rPr lang="en-US" sz="1200" dirty="0">
+                <a:solidFill>
+                  <a:srgbClr val="5B6472"/>
+                </a:solidFill>
+                <a:latin typeface="Aptos"/>
+                <a:cs typeface="Aptos"/>
+              </a:rPr>
+              <a:t>96.9%</a:t>
+            </a:r>
+          </a:p>
+        </p:txBody>
+      </p:sp>
+      <p:sp>
+        <p:nvSpPr>
+          <p:cNvPr id="21" name="rect"/>
+          <p:cNvSpPr/>
+          <p:nvPr/>
+        </p:nvSpPr>
+        <p:spPr>
+          <a:xfrm>
+            <a:off x="4421505" y="4933950"/>
+            <a:ext cx="1183005" cy="330200"/>
+          </a:xfrm>
+          <a:prstGeom prst="rect">
+            <a:avLst/>
+          </a:prstGeom>
+          <a:solidFill>
+            <a:srgbClr val="FFFFFF"/>
+          </a:solidFill>
+          <a:ln w="9525">
+            <a:solidFill>
+              <a:srgbClr val="D7D7CC"/>
+            </a:solidFill>
+          </a:ln>
+        </p:spPr>
+      </p:sp>
+      <p:sp>
+        <p:nvSpPr>
+          <p:cNvPr id="22" name="text"/>
+          <p:cNvSpPr txBox="1"/>
+          <p:nvPr/>
+        </p:nvSpPr>
+        <p:spPr>
+          <a:xfrm>
+            <a:off x="4497705" y="4981575"/>
+            <a:ext cx="1030605" cy="254000"/>
+          </a:xfrm>
+          <a:prstGeom prst="rect">
+            <a:avLst/>
+          </a:prstGeom>
+          <a:noFill/>
+          <a:ln>
+            <a:noFill/>
+          </a:ln>
+        </p:spPr>
+        <p:txBody>
+          <a:bodyPr wrap="square" anchor="ctr" lIns="0" tIns="0" rIns="0" bIns="0"/>
+          <a:lstStyle/>
+          <a:p>
+            <a:pPr algn="l"/>
+            <a:r>
+              <a:rPr lang="en-US" sz="1200" dirty="0">
+                <a:solidFill>
+                  <a:srgbClr val="5B6472"/>
+                </a:solidFill>
+                <a:latin typeface="Aptos"/>
+                <a:cs typeface="Aptos"/>
+              </a:rPr>
+              <a:t>93.8%</a:t>
+            </a:r>
+          </a:p>
+        </p:txBody>
+      </p:sp>
+      <p:sp>
+        <p:nvSpPr>
+          <p:cNvPr id="23" name="rect"/>
+          <p:cNvSpPr/>
+          <p:nvPr/>
+        </p:nvSpPr>
+        <p:spPr>
+          <a:xfrm>
+            <a:off x="5604510" y="4933950"/>
+            <a:ext cx="1577340" cy="330200"/>
+          </a:xfrm>
+          <a:prstGeom prst="rect">
+            <a:avLst/>
+          </a:prstGeom>
+          <a:solidFill>
+            <a:srgbClr val="FFFFFF"/>
+          </a:solidFill>
+          <a:ln w="9525">
+            <a:solidFill>
+              <a:srgbClr val="D7D7CC"/>
+            </a:solidFill>
+          </a:ln>
+        </p:spPr>
+      </p:sp>
+      <p:sp>
+        <p:nvSpPr>
+          <p:cNvPr id="24" name="text"/>
+          <p:cNvSpPr txBox="1"/>
+          <p:nvPr/>
+        </p:nvSpPr>
+        <p:spPr>
+          <a:xfrm>
+            <a:off x="5680710" y="4981575"/>
+            <a:ext cx="1424940" cy="254000"/>
+          </a:xfrm>
+          <a:prstGeom prst="rect">
+            <a:avLst/>
+          </a:prstGeom>
+          <a:noFill/>
+          <a:ln>
+            <a:noFill/>
+          </a:ln>
+        </p:spPr>
+        <p:txBody>
+          <a:bodyPr wrap="square" anchor="ctr" lIns="0" tIns="0" rIns="0" bIns="0"/>
+          <a:lstStyle/>
+          <a:p>
+            <a:pPr algn="l"/>
+            <a:r>
+              <a:rPr lang="en-US" sz="1200" dirty="0">
+                <a:solidFill>
+                  <a:srgbClr val="5B6472"/>
+                </a:solidFill>
+                <a:latin typeface="Aptos"/>
+                <a:cs typeface="Aptos"/>
+              </a:rPr>
+              <a:t>14.8 ms</a:t>
+            </a:r>
+          </a:p>
+        </p:txBody>
+      </p:sp>
+      <p:sp>
+        <p:nvSpPr>
+          <p:cNvPr id="25" name="rect"/>
+          <p:cNvSpPr/>
+          <p:nvPr/>
+        </p:nvSpPr>
+        <p:spPr>
+          <a:xfrm>
+            <a:off x="609600" y="5264150"/>
+            <a:ext cx="2628900" cy="330200"/>
+          </a:xfrm>
+          <a:prstGeom prst="rect">
+            <a:avLst/>
+          </a:prstGeom>
+          <a:solidFill>
+            <a:srgbClr val="F1F5F2"/>
+          </a:solidFill>
+          <a:ln w="9525">
+            <a:solidFill>
+              <a:srgbClr val="D7D7CC"/>
+            </a:solidFill>
+          </a:ln>
+        </p:spPr>
+      </p:sp>
+      <p:sp>
+        <p:nvSpPr>
+          <p:cNvPr id="26" name="text"/>
+          <p:cNvSpPr txBox="1"/>
+          <p:nvPr/>
+        </p:nvSpPr>
+        <p:spPr>
+          <a:xfrm>
+            <a:off x="685800" y="5311775"/>
+            <a:ext cx="2476500" cy="254000"/>
+          </a:xfrm>
+          <a:prstGeom prst="rect">
+            <a:avLst/>
+          </a:prstGeom>
+          <a:noFill/>
+          <a:ln>
+            <a:noFill/>
+          </a:ln>
+        </p:spPr>
+        <p:txBody>
+          <a:bodyPr wrap="square" anchor="ctr" lIns="0" tIns="0" rIns="0" bIns="0"/>
+          <a:lstStyle/>
+          <a:p>
+            <a:pPr algn="l"/>
+            <a:r>
+              <a:rPr lang="en-US" sz="1200" b="1" dirty="0">
+                <a:solidFill>
+                  <a:srgbClr val="111827"/>
+                </a:solidFill>
+                <a:latin typeface="Aptos"/>
+                <a:cs typeface="Aptos"/>
+              </a:rPr>
+              <a:t>paper IEPS + graph SCF (ext.)</a:t>
+            </a:r>
+          </a:p>
+        </p:txBody>
+      </p:sp>
+      <p:sp>
+        <p:nvSpPr>
+          <p:cNvPr id="27" name="rect"/>
+          <p:cNvSpPr/>
+          <p:nvPr/>
+        </p:nvSpPr>
+        <p:spPr>
+          <a:xfrm>
+            <a:off x="3238500" y="5264150"/>
+            <a:ext cx="1183005" cy="330200"/>
+          </a:xfrm>
+          <a:prstGeom prst="rect">
+            <a:avLst/>
+          </a:prstGeom>
+          <a:solidFill>
+            <a:srgbClr val="F1F5F2"/>
+          </a:solidFill>
+          <a:ln w="9525">
+            <a:solidFill>
+              <a:srgbClr val="D7D7CC"/>
+            </a:solidFill>
+          </a:ln>
+        </p:spPr>
+      </p:sp>
+      <p:sp>
+        <p:nvSpPr>
+          <p:cNvPr id="28" name="text"/>
+          <p:cNvSpPr txBox="1"/>
+          <p:nvPr/>
+        </p:nvSpPr>
+        <p:spPr>
+          <a:xfrm>
+            <a:off x="3314700" y="5311775"/>
+            <a:ext cx="1030605" cy="254000"/>
+          </a:xfrm>
+          <a:prstGeom prst="rect">
+            <a:avLst/>
+          </a:prstGeom>
+          <a:noFill/>
+          <a:ln>
+            <a:noFill/>
+          </a:ln>
+        </p:spPr>
+        <p:txBody>
+          <a:bodyPr wrap="square" anchor="ctr" lIns="0" tIns="0" rIns="0" bIns="0"/>
+          <a:lstStyle/>
+          <a:p>
+            <a:pPr algn="l"/>
+            <a:r>
+              <a:rPr lang="en-US" sz="1200" dirty="0">
+                <a:solidFill>
+                  <a:srgbClr val="5B6472"/>
+                </a:solidFill>
+                <a:latin typeface="Aptos"/>
+                <a:cs typeface="Aptos"/>
+              </a:rPr>
+              <a:t>96.9%</a:t>
+            </a:r>
+          </a:p>
+        </p:txBody>
+      </p:sp>
+      <p:sp>
+        <p:nvSpPr>
+          <p:cNvPr id="29" name="rect"/>
+          <p:cNvSpPr/>
+          <p:nvPr/>
+        </p:nvSpPr>
+        <p:spPr>
+          <a:xfrm>
+            <a:off x="4421505" y="5264150"/>
+            <a:ext cx="1183005" cy="330200"/>
+          </a:xfrm>
+          <a:prstGeom prst="rect">
+            <a:avLst/>
+          </a:prstGeom>
+          <a:solidFill>
+            <a:srgbClr val="F1F5F2"/>
+          </a:solidFill>
+          <a:ln w="9525">
+            <a:solidFill>
+              <a:srgbClr val="D7D7CC"/>
+            </a:solidFill>
+          </a:ln>
+        </p:spPr>
+      </p:sp>
+      <p:sp>
+        <p:nvSpPr>
+          <p:cNvPr id="30" name="text"/>
+          <p:cNvSpPr txBox="1"/>
+          <p:nvPr/>
+        </p:nvSpPr>
+        <p:spPr>
+          <a:xfrm>
+            <a:off x="4497705" y="5311775"/>
+            <a:ext cx="1030605" cy="254000"/>
+          </a:xfrm>
+          <a:prstGeom prst="rect">
+            <a:avLst/>
+          </a:prstGeom>
+          <a:noFill/>
+          <a:ln>
+            <a:noFill/>
+          </a:ln>
+        </p:spPr>
+        <p:txBody>
+          <a:bodyPr wrap="square" anchor="ctr" lIns="0" tIns="0" rIns="0" bIns="0"/>
+          <a:lstStyle/>
+          <a:p>
+            <a:pPr algn="l"/>
+            <a:r>
+              <a:rPr lang="en-US" sz="1200" dirty="0">
+                <a:solidFill>
+                  <a:srgbClr val="5B6472"/>
+                </a:solidFill>
+                <a:latin typeface="Aptos"/>
+                <a:cs typeface="Aptos"/>
+              </a:rPr>
+              <a:t>94.5%</a:t>
+            </a:r>
+          </a:p>
+        </p:txBody>
+      </p:sp>
+      <p:sp>
+        <p:nvSpPr>
+          <p:cNvPr id="31" name="rect"/>
+          <p:cNvSpPr/>
+          <p:nvPr/>
+        </p:nvSpPr>
+        <p:spPr>
+          <a:xfrm>
+            <a:off x="5604510" y="5264150"/>
+            <a:ext cx="1577340" cy="330200"/>
+          </a:xfrm>
+          <a:prstGeom prst="rect">
+            <a:avLst/>
+          </a:prstGeom>
+          <a:solidFill>
+            <a:srgbClr val="F1F5F2"/>
+          </a:solidFill>
+          <a:ln w="9525">
+            <a:solidFill>
+              <a:srgbClr val="D7D7CC"/>
+            </a:solidFill>
+          </a:ln>
+        </p:spPr>
+      </p:sp>
+      <p:sp>
+        <p:nvSpPr>
+          <p:cNvPr id="32" name="text"/>
+          <p:cNvSpPr txBox="1"/>
+          <p:nvPr/>
+        </p:nvSpPr>
+        <p:spPr>
+          <a:xfrm>
+            <a:off x="5680710" y="5311775"/>
+            <a:ext cx="1424940" cy="254000"/>
+          </a:xfrm>
+          <a:prstGeom prst="rect">
+            <a:avLst/>
+          </a:prstGeom>
+          <a:noFill/>
+          <a:ln>
+            <a:noFill/>
+          </a:ln>
+        </p:spPr>
+        <p:txBody>
+          <a:bodyPr wrap="square" anchor="ctr" lIns="0" tIns="0" rIns="0" bIns="0"/>
+          <a:lstStyle/>
+          <a:p>
+            <a:pPr algn="l"/>
+            <a:r>
+              <a:rPr lang="en-US" sz="1200" dirty="0">
+                <a:solidFill>
+                  <a:srgbClr val="5B6472"/>
+                </a:solidFill>
+                <a:latin typeface="Aptos"/>
+                <a:cs typeface="Aptos"/>
+              </a:rPr>
+              <a:t>136.7 ms</a:t>
+            </a:r>
+          </a:p>
+        </p:txBody>
+      </p:sp>
+      <p:sp>
+        <p:nvSpPr>
+          <p:cNvPr id="33" name="rect"/>
+          <p:cNvSpPr/>
+          <p:nvPr/>
+        </p:nvSpPr>
+        <p:spPr>
+          <a:xfrm>
+            <a:off x="609600" y="5594350"/>
+            <a:ext cx="2628900" cy="330200"/>
+          </a:xfrm>
+          <a:prstGeom prst="rect">
+            <a:avLst/>
+          </a:prstGeom>
+          <a:solidFill>
+            <a:srgbClr val="FFFFFF"/>
+          </a:solidFill>
+          <a:ln w="9525">
+            <a:solidFill>
+              <a:srgbClr val="D7D7CC"/>
+            </a:solidFill>
+          </a:ln>
+        </p:spPr>
+      </p:sp>
+      <p:sp>
+        <p:nvSpPr>
+          <p:cNvPr id="34" name="text"/>
+          <p:cNvSpPr txBox="1"/>
+          <p:nvPr/>
+        </p:nvSpPr>
+        <p:spPr>
+          <a:xfrm>
+            <a:off x="685800" y="5641975"/>
+            <a:ext cx="2476500" cy="254000"/>
+          </a:xfrm>
+          <a:prstGeom prst="rect">
+            <a:avLst/>
+          </a:prstGeom>
+          <a:noFill/>
+          <a:ln>
+            <a:noFill/>
+          </a:ln>
+        </p:spPr>
+        <p:txBody>
+          <a:bodyPr wrap="square" anchor="ctr" lIns="0" tIns="0" rIns="0" bIns="0"/>
+          <a:lstStyle/>
+          <a:p>
+            <a:pPr algn="l"/>
+            <a:r>
+              <a:rPr lang="en-US" sz="1200" b="1" dirty="0">
+                <a:solidFill>
+                  <a:srgbClr val="111827"/>
+                </a:solidFill>
+                <a:latin typeface="Aptos"/>
+                <a:cs typeface="Aptos"/>
+              </a:rPr>
+              <a:t>improved IEPS + greedy SCF (ext.)</a:t>
+            </a:r>
+          </a:p>
+        </p:txBody>
+      </p:sp>
+      <p:sp>
+        <p:nvSpPr>
+          <p:cNvPr id="35" name="rect"/>
+          <p:cNvSpPr/>
+          <p:nvPr/>
+        </p:nvSpPr>
+        <p:spPr>
+          <a:xfrm>
+            <a:off x="3238500" y="5594350"/>
+            <a:ext cx="1183005" cy="330200"/>
+          </a:xfrm>
+          <a:prstGeom prst="rect">
+            <a:avLst/>
+          </a:prstGeom>
+          <a:solidFill>
+            <a:srgbClr val="FFFFFF"/>
+          </a:solidFill>
+          <a:ln w="9525">
+            <a:solidFill>
+              <a:srgbClr val="D7D7CC"/>
+            </a:solidFill>
+          </a:ln>
+        </p:spPr>
+      </p:sp>
+      <p:sp>
+        <p:nvSpPr>
+          <p:cNvPr id="36" name="text"/>
+          <p:cNvSpPr txBox="1"/>
+          <p:nvPr/>
+        </p:nvSpPr>
+        <p:spPr>
+          <a:xfrm>
+            <a:off x="3314700" y="5641975"/>
+            <a:ext cx="1030605" cy="254000"/>
+          </a:xfrm>
+          <a:prstGeom prst="rect">
+            <a:avLst/>
+          </a:prstGeom>
+          <a:noFill/>
+          <a:ln>
+            <a:noFill/>
+          </a:ln>
+        </p:spPr>
+        <p:txBody>
+          <a:bodyPr wrap="square" anchor="ctr" lIns="0" tIns="0" rIns="0" bIns="0"/>
+          <a:lstStyle/>
+          <a:p>
+            <a:pPr algn="l"/>
+            <a:r>
+              <a:rPr lang="en-US" sz="1200" dirty="0">
+                <a:solidFill>
+                  <a:srgbClr val="5B6472"/>
+                </a:solidFill>
+                <a:latin typeface="Aptos"/>
+                <a:cs typeface="Aptos"/>
+              </a:rPr>
+              <a:t>29.3%</a:t>
+            </a:r>
+          </a:p>
+        </p:txBody>
+      </p:sp>
+      <p:sp>
+        <p:nvSpPr>
+          <p:cNvPr id="37" name="rect"/>
+          <p:cNvSpPr/>
+          <p:nvPr/>
+        </p:nvSpPr>
+        <p:spPr>
+          <a:xfrm>
+            <a:off x="4421505" y="5594350"/>
+            <a:ext cx="1183005" cy="330200"/>
+          </a:xfrm>
+          <a:prstGeom prst="rect">
+            <a:avLst/>
+          </a:prstGeom>
+          <a:solidFill>
+            <a:srgbClr val="FFFFFF"/>
+          </a:solidFill>
+          <a:ln w="9525">
+            <a:solidFill>
+              <a:srgbClr val="D7D7CC"/>
+            </a:solidFill>
+          </a:ln>
+        </p:spPr>
+      </p:sp>
+      <p:sp>
+        <p:nvSpPr>
+          <p:cNvPr id="38" name="text"/>
+          <p:cNvSpPr txBox="1"/>
+          <p:nvPr/>
+        </p:nvSpPr>
+        <p:spPr>
+          <a:xfrm>
+            <a:off x="4497705" y="5641975"/>
+            <a:ext cx="1030605" cy="254000"/>
+          </a:xfrm>
+          <a:prstGeom prst="rect">
+            <a:avLst/>
+          </a:prstGeom>
+          <a:noFill/>
+          <a:ln>
+            <a:noFill/>
+          </a:ln>
+        </p:spPr>
+        <p:txBody>
+          <a:bodyPr wrap="square" anchor="ctr" lIns="0" tIns="0" rIns="0" bIns="0"/>
+          <a:lstStyle/>
+          <a:p>
+            <a:pPr algn="l"/>
+            <a:r>
+              <a:rPr lang="en-US" sz="1200" dirty="0">
+                <a:solidFill>
+                  <a:srgbClr val="5B6472"/>
+                </a:solidFill>
+                <a:latin typeface="Aptos"/>
+                <a:cs typeface="Aptos"/>
+              </a:rPr>
+              <a:t>25.0%</a:t>
+            </a:r>
+          </a:p>
+        </p:txBody>
+      </p:sp>
+      <p:sp>
+        <p:nvSpPr>
+          <p:cNvPr id="39" name="rect"/>
+          <p:cNvSpPr/>
+          <p:nvPr/>
+        </p:nvSpPr>
+        <p:spPr>
+          <a:xfrm>
+            <a:off x="5604510" y="5594350"/>
+            <a:ext cx="1577340" cy="330200"/>
+          </a:xfrm>
+          <a:prstGeom prst="rect">
+            <a:avLst/>
+          </a:prstGeom>
+          <a:solidFill>
+            <a:srgbClr val="FFFFFF"/>
+          </a:solidFill>
+          <a:ln w="9525">
+            <a:solidFill>
+              <a:srgbClr val="D7D7CC"/>
+            </a:solidFill>
+          </a:ln>
+        </p:spPr>
+      </p:sp>
+      <p:sp>
+        <p:nvSpPr>
+          <p:cNvPr id="40" name="text"/>
+          <p:cNvSpPr txBox="1"/>
+          <p:nvPr/>
+        </p:nvSpPr>
+        <p:spPr>
+          <a:xfrm>
+            <a:off x="5680710" y="5641975"/>
+            <a:ext cx="1424940" cy="254000"/>
+          </a:xfrm>
+          <a:prstGeom prst="rect">
+            <a:avLst/>
+          </a:prstGeom>
+          <a:noFill/>
+          <a:ln>
+            <a:noFill/>
+          </a:ln>
+        </p:spPr>
+        <p:txBody>
+          <a:bodyPr wrap="square" anchor="ctr" lIns="0" tIns="0" rIns="0" bIns="0"/>
+          <a:lstStyle/>
+          <a:p>
+            <a:pPr algn="l"/>
+            <a:r>
+              <a:rPr lang="en-US" sz="1200" dirty="0">
+                <a:solidFill>
+                  <a:srgbClr val="5B6472"/>
+                </a:solidFill>
+                <a:latin typeface="Aptos"/>
+                <a:cs typeface="Aptos"/>
+              </a:rPr>
+              <a:t>17.6 ms</a:t>
+            </a:r>
+          </a:p>
+        </p:txBody>
+      </p:sp>
+      <p:sp>
+        <p:nvSpPr>
+          <p:cNvPr id="41" name="rect"/>
+          <p:cNvSpPr/>
+          <p:nvPr/>
+        </p:nvSpPr>
+        <p:spPr>
+          <a:xfrm>
+            <a:off x="7524750" y="4629150"/>
+            <a:ext cx="4057650" cy="1295400"/>
+          </a:xfrm>
+          <a:prstGeom prst="rect">
+            <a:avLst/>
+          </a:prstGeom>
+          <a:solidFill>
+            <a:srgbClr val="FFFFFF"/>
+          </a:solidFill>
+          <a:ln w="9525">
+            <a:solidFill>
+              <a:srgbClr val="D7D7CC"/>
+            </a:solidFill>
+          </a:ln>
+        </p:spPr>
+      </p:sp>
+      <p:sp>
+        <p:nvSpPr>
+          <p:cNvPr id="42" name="rect"/>
+          <p:cNvSpPr/>
+          <p:nvPr/>
+        </p:nvSpPr>
+        <p:spPr>
+          <a:xfrm>
+            <a:off x="7524750" y="4629150"/>
+            <a:ext cx="57150" cy="1295400"/>
+          </a:xfrm>
+          <a:prstGeom prst="rect">
+            <a:avLst/>
+          </a:prstGeom>
+          <a:solidFill>
+            <a:srgbClr val="B45309"/>
+          </a:solidFill>
+          <a:ln w="9525">
+            <a:solidFill>
+              <a:srgbClr val="B45309"/>
+            </a:solidFill>
+          </a:ln>
+        </p:spPr>
+      </p:sp>
+      <p:sp>
+        <p:nvSpPr>
+          <p:cNvPr id="43" name="text"/>
+          <p:cNvSpPr txBox="1"/>
+          <p:nvPr/>
+        </p:nvSpPr>
+        <p:spPr>
+          <a:xfrm>
+            <a:off x="7696200" y="4762500"/>
+            <a:ext cx="3771900" cy="247650"/>
+          </a:xfrm>
+          <a:prstGeom prst="rect">
+            <a:avLst/>
+          </a:prstGeom>
+          <a:noFill/>
+          <a:ln>
+            <a:noFill/>
+          </a:ln>
+        </p:spPr>
+        <p:txBody>
+          <a:bodyPr wrap="square" anchor="t" lIns="0" tIns="0" rIns="0" bIns="0"/>
+          <a:lstStyle/>
+          <a:p>
+            <a:pPr algn="l"/>
+            <a:r>
+              <a:rPr lang="en-US" sz="1500" b="1" dirty="0">
+                <a:solidFill>
+                  <a:srgbClr val="111827"/>
+                </a:solidFill>
+                <a:latin typeface="Aptos"/>
+                <a:cs typeface="Aptos"/>
+              </a:rPr>
+              <a:t>Reading</a:t>
+            </a:r>
+          </a:p>
+        </p:txBody>
+      </p:sp>
+      <p:sp>
+        <p:nvSpPr>
+          <p:cNvPr id="44" name="text"/>
+          <p:cNvSpPr txBox="1"/>
+          <p:nvPr/>
+        </p:nvSpPr>
+        <p:spPr>
+          <a:xfrm>
+            <a:off x="7696200" y="5048250"/>
+            <a:ext cx="3752850" cy="762000"/>
+          </a:xfrm>
+          <a:prstGeom prst="rect">
+            <a:avLst/>
+          </a:prstGeom>
+          <a:noFill/>
+          <a:ln>
+            <a:noFill/>
+          </a:ln>
+        </p:spPr>
+        <p:txBody>
+          <a:bodyPr wrap="square" anchor="t" lIns="0" tIns="0" rIns="0" bIns="0"/>
+          <a:lstStyle/>
+          <a:p>
+            <a:pPr algn="l"/>
+            <a:r>
+              <a:rPr lang="en-US" sz="1200" dirty="0">
+                <a:solidFill>
+                  <a:srgbClr val="5B6472"/>
+                </a:solidFill>
+                <a:latin typeface="Aptos"/>
+                <a:cs typeface="Aptos"/>
+              </a:rPr>
+              <a:t>31/32 IEPS points sit on the vase edge; greedy SCF closes the contour in ~15 ms - consistent with the paper's low-complexity claim (Table V: 37 ms vs 363 ms for Snake). The improved-IEPS extension does not transfer here (F1 25%) - reported, not hidden.</a:t>
+            </a:r>
+          </a:p>
+        </p:txBody>
+      </p:sp>
+      <p:sp>
+        <p:nvSpPr>
+          <p:cNvPr id="45" name="text"/>
+          <p:cNvSpPr txBox="1"/>
+          <p:nvPr/>
+        </p:nvSpPr>
+        <p:spPr>
+          <a:xfrm>
+            <a:off x="609600" y="6553200"/>
+            <a:ext cx="5905500" cy="171450"/>
+          </a:xfrm>
+          <a:prstGeom prst="rect">
+            <a:avLst/>
+          </a:prstGeom>
+          <a:noFill/>
+          <a:ln>
+            <a:noFill/>
+          </a:ln>
+        </p:spPr>
+        <p:txBody>
+          <a:bodyPr wrap="square" anchor="t" lIns="0" tIns="0" rIns="0" bIns="0"/>
+          <a:lstStyle/>
+          <a:p>
+            <a:pPr algn="l"/>
+            <a:r>
+              <a:rPr lang="en-US" sz="1000" dirty="0">
+                <a:solidFill>
+                  <a:srgbClr val="727B85"/>
+                </a:solidFill>
+                <a:latin typeface="Aptos"/>
+                <a:cs typeface="Aptos"/>
+              </a:rPr>
+              <a:t>IEPS + SCF reproducibility study  |  Parth Goswami  |  10 / 11</a:t>
+            </a:r>
+          </a:p>
+        </p:txBody>
+      </p:sp>
+      <p:sp>
+        <p:nvSpPr>
+          <p:cNvPr id="46" name="text"/>
+          <p:cNvSpPr txBox="1"/>
+          <p:nvPr/>
+        </p:nvSpPr>
+        <p:spPr>
+          <a:xfrm>
+            <a:off x="7239000" y="6553200"/>
+            <a:ext cx="4343400" cy="171450"/>
+          </a:xfrm>
+          <a:prstGeom prst="rect">
+            <a:avLst/>
+          </a:prstGeom>
+          <a:noFill/>
+          <a:ln>
+            <a:noFill/>
+          </a:ln>
+        </p:spPr>
+        <p:txBody>
+          <a:bodyPr wrap="square" anchor="t" lIns="0" tIns="0" rIns="0" bIns="0"/>
+          <a:lstStyle/>
+          <a:p>
+            <a:pPr algn="r"/>
+            <a:r>
+              <a:rPr lang="en-US" sz="1000" dirty="0">
+                <a:solidFill>
+                  <a:srgbClr val="727B85"/>
+                </a:solidFill>
+                <a:latin typeface="Aptos"/>
+                <a:cs typeface="Aptos"/>
+              </a:rPr>
+              <a:t>Hsu et al., ICARCV 2010 [1]</a:t>
+            </a:r>
+          </a:p>
+        </p:txBody>
+      </p:sp>
+    </p:spTree>
+  </p:cSld>
+  <p:clrMapOvr>
+    <a:masterClrMapping/>
+  </p:clrMapOvr>
+</p:sld>
+</file>
+
+<file path=ppt/slides/slide11.xml><?xml version="1.0" encoding="utf-8"?>
+<p:sld xmlns:a="http://schemas.openxmlformats.org/drawingml/2006/main" xmlns:r="http://schemas.openxmlformats.org/officeDocument/2006/relationships" xmlns:p="http://schemas.openxmlformats.org/presentationml/2006/main">
+  <p:cSld>
+    <p:spTree>
+      <p:nvGrpSpPr>
+        <p:cNvPr id="1" name=""/>
+        <p:cNvGrpSpPr/>
+        <p:nvPr/>
+      </p:nvGrpSpPr>
+      <p:grpSpPr>
+        <a:xfrm>
+          <a:off x="0" y="0"/>
+          <a:ext cx="0" cy="0"/>
+          <a:chOff x="0" y="0"/>
+          <a:chExt cx="0" cy="0"/>
+        </a:xfrm>
+      </p:grpSpPr>
+      <p:sp>
+        <p:nvSpPr>
+          <p:cNvPr id="2" name="rect"/>
+          <p:cNvSpPr/>
+          <p:nvPr/>
+        </p:nvSpPr>
+        <p:spPr>
+          <a:xfrm>
+            <a:off x="0" y="0"/>
+            <a:ext cx="12192000" cy="6858000"/>
+          </a:xfrm>
+          <a:prstGeom prst="rect">
+            <a:avLst/>
+          </a:prstGeom>
+          <a:solidFill>
+            <a:srgbClr val="F7F7F2"/>
+          </a:solidFill>
+          <a:ln w="9525">
+            <a:solidFill>
+              <a:srgbClr val="F7F7F2"/>
+            </a:solidFill>
+          </a:ln>
+        </p:spPr>
+      </p:sp>
+      <p:sp>
+        <p:nvSpPr>
+          <p:cNvPr id="3" name="text"/>
+          <p:cNvSpPr txBox="1"/>
+          <p:nvPr/>
+        </p:nvSpPr>
+        <p:spPr>
+          <a:xfrm>
+            <a:off x="609600" y="323850"/>
+            <a:ext cx="10477500" cy="190500"/>
+          </a:xfrm>
+          <a:prstGeom prst="rect">
+            <a:avLst/>
+          </a:prstGeom>
+          <a:noFill/>
+          <a:ln>
+            <a:noFill/>
+          </a:ln>
+        </p:spPr>
+        <p:txBody>
+          <a:bodyPr wrap="square" anchor="t" lIns="0" tIns="0" rIns="0" bIns="0"/>
+          <a:lstStyle/>
+          <a:p>
+            <a:pPr algn="l"/>
+            <a:r>
+              <a:rPr lang="en-US" sz="1200" b="1" dirty="0">
+                <a:solidFill>
+                  <a:srgbClr val="0F766E"/>
+                </a:solidFill>
+                <a:latin typeface="Aptos"/>
+                <a:cs typeface="Aptos"/>
+              </a:rPr>
+              <a:t>CONCLUSION</a:t>
+            </a:r>
+          </a:p>
+        </p:txBody>
+      </p:sp>
+      <p:sp>
+        <p:nvSpPr>
+          <p:cNvPr id="4" name="text"/>
+          <p:cNvSpPr txBox="1"/>
+          <p:nvPr/>
+        </p:nvSpPr>
+        <p:spPr>
+          <a:xfrm>
+            <a:off x="609600" y="552450"/>
+            <a:ext cx="10972800" cy="419100"/>
+          </a:xfrm>
+          <a:prstGeom prst="rect">
+            <a:avLst/>
+          </a:prstGeom>
+          <a:noFill/>
+          <a:ln>
+            <a:noFill/>
+          </a:ln>
+        </p:spPr>
+        <p:txBody>
+          <a:bodyPr wrap="square" anchor="t" lIns="0" tIns="0" rIns="0" bIns="0"/>
+          <a:lstStyle/>
+          <a:p>
+            <a:pPr algn="l"/>
+            <a:r>
+              <a:rPr lang="en-US" sz="2900" b="1" dirty="0">
+                <a:solidFill>
+                  <a:srgbClr val="111827"/>
+                </a:solidFill>
+                <a:latin typeface="Aptos"/>
+                <a:cs typeface="Aptos"/>
+              </a:rPr>
+              <a:t>The method reproduces - once the missing rules are written down</a:t>
+            </a:r>
+          </a:p>
+        </p:txBody>
+      </p:sp>
+      <p:sp>
+        <p:nvSpPr>
+          <p:cNvPr id="5" name="text"/>
+          <p:cNvSpPr txBox="1"/>
+          <p:nvPr/>
+        </p:nvSpPr>
+        <p:spPr>
+          <a:xfrm>
+            <a:off x="609600" y="990600"/>
+            <a:ext cx="10972800" cy="381000"/>
+          </a:xfrm>
+          <a:prstGeom prst="rect">
+            <a:avLst/>
+          </a:prstGeom>
+          <a:noFill/>
+          <a:ln>
+            <a:noFill/>
+          </a:ln>
+        </p:spPr>
+        <p:txBody>
+          <a:bodyPr wrap="square" anchor="t" lIns="0" tIns="0" rIns="0" bIns="0"/>
+          <a:lstStyle/>
+          <a:p>
+            <a:pPr algn="l"/>
+            <a:r>
+              <a:rPr lang="en-US" sz="1300" dirty="0">
+                <a:solidFill>
+                  <a:srgbClr val="5B6472"/>
+                </a:solidFill>
+                <a:latin typeface="Aptos"/>
+                <a:cs typeface="Aptos"/>
+              </a:rPr>
+              <a:t>The reproducibility audit is the contribution: assumptions were made explicit, implemented, and measured.</a:t>
+            </a:r>
+          </a:p>
+        </p:txBody>
+      </p:sp>
+      <p:sp>
+        <p:nvSpPr>
+          <p:cNvPr id="6" name="rect"/>
+          <p:cNvSpPr/>
+          <p:nvPr/>
+        </p:nvSpPr>
+        <p:spPr>
+          <a:xfrm>
+            <a:off x="609600" y="1428750"/>
+            <a:ext cx="10972800" cy="9525"/>
+          </a:xfrm>
+          <a:prstGeom prst="rect">
+            <a:avLst/>
+          </a:prstGeom>
+          <a:solidFill>
+            <a:srgbClr val="D7D7CC"/>
+          </a:solidFill>
+          <a:ln w="9525">
+            <a:solidFill>
+              <a:srgbClr val="D7D7CC"/>
+            </a:solidFill>
+          </a:ln>
+        </p:spPr>
+      </p:sp>
       <p:sp>
         <p:nvSpPr>
           <p:cNvPr id="7" name="rect"/>
@@ -1332,7 +2748,7 @@
                 <a:latin typeface="Aptos"/>
                 <a:cs typeface="Aptos"/>
               </a:rPr>
-              <a:t>IEPS + SCF reproducibility study  |  Parth Goswami  |  10 / 10</a:t>
+              <a:t>IEPS + SCF reproducibility study  |  Parth Goswami  |  11 / 11</a:t>
             </a:r>
           </a:p>
         </p:txBody>
@@ -2054,7 +3470,7 @@
                 <a:latin typeface="Aptos"/>
                 <a:cs typeface="Aptos"/>
               </a:rPr>
-              <a:t>IEPS + SCF reproducibility study  |  Parth Goswami  |  02 / 10</a:t>
+              <a:t>IEPS + SCF reproducibility study  |  Parth Goswami  |  02 / 11</a:t>
             </a:r>
           </a:p>
         </p:txBody>
@@ -3099,7 +4515,7 @@
                 <a:latin typeface="Aptos"/>
                 <a:cs typeface="Aptos"/>
               </a:rPr>
-              <a:t>IEPS + SCF reproducibility study  |  Parth Goswami  |  03 / 10</a:t>
+              <a:t>IEPS + SCF reproducibility study  |  Parth Goswami  |  03 / 11</a:t>
             </a:r>
           </a:p>
         </p:txBody>
@@ -4085,7 +5501,7 @@
                 <a:latin typeface="Aptos"/>
                 <a:cs typeface="Aptos"/>
               </a:rPr>
-              <a:t>IEPS + SCF reproducibility study  |  Parth Goswami  |  04 / 10</a:t>
+              <a:t>IEPS + SCF reproducibility study  |  Parth Goswami  |  04 / 11</a:t>
             </a:r>
           </a:p>
         </p:txBody>
@@ -5929,7 +7345,7 @@
                 <a:latin typeface="Aptos"/>
                 <a:cs typeface="Aptos"/>
               </a:rPr>
-              <a:t>IEPS + SCF reproducibility study  |  Parth Goswami  |  05 / 10</a:t>
+              <a:t>IEPS + SCF reproducibility study  |  Parth Goswami  |  05 / 11</a:t>
             </a:r>
           </a:p>
         </p:txBody>
@@ -7786,7 +9202,7 @@
                 <a:latin typeface="Aptos"/>
                 <a:cs typeface="Aptos"/>
               </a:rPr>
-              <a:t>IEPS + SCF reproducibility study  |  Parth Goswami  |  06 / 10</a:t>
+              <a:t>IEPS + SCF reproducibility study  |  Parth Goswami  |  06 / 11</a:t>
             </a:r>
           </a:p>
         </p:txBody>
@@ -8919,7 +10335,7 @@
                 <a:latin typeface="Aptos"/>
                 <a:cs typeface="Aptos"/>
               </a:rPr>
-              <a:t>IEPS + SCF reproducibility study  |  Parth Goswami  |  07 / 10</a:t>
+              <a:t>IEPS + SCF reproducibility study  |  Parth Goswami  |  07 / 11</a:t>
             </a:r>
           </a:p>
         </p:txBody>
@@ -10089,7 +11505,7 @@
                 <a:latin typeface="Aptos"/>
                 <a:cs typeface="Aptos"/>
               </a:rPr>
-              <a:t>IEPS + SCF reproducibility study  |  Parth Goswami  |  08 / 10</a:t>
+              <a:t>IEPS + SCF reproducibility study  |  Parth Goswami  |  08 / 11</a:t>
             </a:r>
           </a:p>
         </p:txBody>
@@ -13421,7 +14837,7 @@
                 <a:latin typeface="Aptos"/>
                 <a:cs typeface="Aptos"/>
               </a:rPr>
-              <a:t>Real vase + honesty notes</a:t>
+              <a:t>Honesty notes</a:t>
             </a:r>
           </a:p>
         </p:txBody>
@@ -13458,7 +14874,7 @@
                 <a:latin typeface="Aptos"/>
                 <a:cs typeface="Aptos"/>
               </a:rPr>
-              <a:t>Real vase (Otsu proxy mask): paper-mode F1 93.8%. Yuen/Snake/Chen comparisons are labeled approximations; on these synthetic shapes they tie or nearly tie (Chen = proposed SCF at every SNR), so they are context, not evidence of the paper's reported gaps.</a:t>
+              <a:t>Yuen/Snake/Chen comparisons are labeled approximations; on these synthetic shapes they tie or nearly tie (Chen = proposed SCF at every SNR), so they are context, not evidence of the paper's reported gaps. The real-image test follows on the next slide.</a:t>
             </a:r>
           </a:p>
         </p:txBody>
@@ -13532,7 +14948,7 @@
                 <a:latin typeface="Aptos"/>
                 <a:cs typeface="Aptos"/>
               </a:rPr>
-              <a:t>IEPS + SCF reproducibility study  |  Parth Goswami  |  09 / 10</a:t>
+              <a:t>IEPS + SCF reproducibility study  |  Parth Goswami  |  09 / 11</a:t>
             </a:r>
           </a:p>
         </p:txBody>

--- a/outputs/ieps_scf_final_presentation.pptx
+++ b/outputs/ieps_scf_final_presentation.pptx
@@ -1290,7 +1290,7 @@
                 <a:latin typeface="Aptos"/>
                 <a:cs typeface="Aptos"/>
               </a:rPr>
-              <a:t>14.8 ms</a:t>
+              <a:t>7.2 ms</a:t>
             </a:r>
           </a:p>
         </p:txBody>
@@ -1534,7 +1534,7 @@
                 <a:latin typeface="Aptos"/>
                 <a:cs typeface="Aptos"/>
               </a:rPr>
-              <a:t>136.7 ms</a:t>
+              <a:t>105.1 ms</a:t>
             </a:r>
           </a:p>
         </p:txBody>
@@ -1778,7 +1778,7 @@
                 <a:latin typeface="Aptos"/>
                 <a:cs typeface="Aptos"/>
               </a:rPr>
-              <a:t>17.6 ms</a:t>
+              <a:t>37.0 ms</a:t>
             </a:r>
           </a:p>
         </p:txBody>
@@ -12580,7 +12580,7 @@
                 <a:latin typeface="Aptos"/>
                 <a:cs typeface="Aptos"/>
               </a:rPr>
-              <a:t>11.7 ms</a:t>
+              <a:t>8.5 ms</a:t>
             </a:r>
           </a:p>
         </p:txBody>
@@ -13007,7 +13007,7 @@
                 <a:latin typeface="Aptos"/>
                 <a:cs typeface="Aptos"/>
               </a:rPr>
-              <a:t>14.4 ms</a:t>
+              <a:t>7.6 ms</a:t>
             </a:r>
           </a:p>
         </p:txBody>
@@ -13434,7 +13434,7 @@
                 <a:latin typeface="Aptos"/>
                 <a:cs typeface="Aptos"/>
               </a:rPr>
-              <a:t>9.8 ms</a:t>
+              <a:t>8.0 ms</a:t>
             </a:r>
           </a:p>
         </p:txBody>
@@ -13861,7 +13861,7 @@
                 <a:latin typeface="Aptos"/>
                 <a:cs typeface="Aptos"/>
               </a:rPr>
-              <a:t>9.7 ms</a:t>
+              <a:t>8.2 ms</a:t>
             </a:r>
           </a:p>
         </p:txBody>

--- a/outputs/ieps_scf_final_presentation.pptx
+++ b/outputs/ieps_scf_final_presentation.pptx
@@ -1290,7 +1290,7 @@
                 <a:latin typeface="Aptos"/>
                 <a:cs typeface="Aptos"/>
               </a:rPr>
-              <a:t>7.2 ms</a:t>
+              <a:t>8.9 ms</a:t>
             </a:r>
           </a:p>
         </p:txBody>
@@ -1534,7 +1534,7 @@
                 <a:latin typeface="Aptos"/>
                 <a:cs typeface="Aptos"/>
               </a:rPr>
-              <a:t>105.1 ms</a:t>
+              <a:t>124.1 ms</a:t>
             </a:r>
           </a:p>
         </p:txBody>
@@ -1778,7 +1778,7 @@
                 <a:latin typeface="Aptos"/>
                 <a:cs typeface="Aptos"/>
               </a:rPr>
-              <a:t>37.0 ms</a:t>
+              <a:t>18.8 ms</a:t>
             </a:r>
           </a:p>
         </p:txBody>
@@ -12580,7 +12580,7 @@
                 <a:latin typeface="Aptos"/>
                 <a:cs typeface="Aptos"/>
               </a:rPr>
-              <a:t>8.5 ms</a:t>
+              <a:t>9.5 ms</a:t>
             </a:r>
           </a:p>
         </p:txBody>
@@ -13007,7 +13007,7 @@
                 <a:latin typeface="Aptos"/>
                 <a:cs typeface="Aptos"/>
               </a:rPr>
-              <a:t>7.6 ms</a:t>
+              <a:t>8.4 ms</a:t>
             </a:r>
           </a:p>
         </p:txBody>
@@ -13434,7 +13434,7 @@
                 <a:latin typeface="Aptos"/>
                 <a:cs typeface="Aptos"/>
               </a:rPr>
-              <a:t>8.0 ms</a:t>
+              <a:t>8.2 ms</a:t>
             </a:r>
           </a:p>
         </p:txBody>
@@ -13861,7 +13861,7 @@
                 <a:latin typeface="Aptos"/>
                 <a:cs typeface="Aptos"/>
               </a:rPr>
-              <a:t>8.2 ms</a:t>
+              <a:t>9.5 ms</a:t>
             </a:r>
           </a:p>
         </p:txBody>
